--- a/assets/figures-editable/c3-c4/c3-e22.pptx
+++ b/assets/figures-editable/c3-c4/c3-e22.pptx
@@ -3104,8 +3104,8 @@
         </p:nvSpPr>
         <p:spPr>
           <a:xfrm>
-            <a:off x="274320" y="137160"/>
-            <a:ext cx="11612880" cy="365760"/>
+            <a:off x="274320" y="118872"/>
+            <a:ext cx="11612880" cy="340105"/>
           </a:xfrm>
           <a:prstGeom prst="rect">
             <a:avLst/>
@@ -3114,7 +3114,7 @@
           <a:effectLst/>
         </p:spPr>
         <p:txBody>
-          <a:bodyPr wrap="square" lIns="27432" rIns="27432" tIns="18288" bIns="18288" anchor="ctr">
+          <a:bodyPr wrap="none" lIns="18288" rIns="18288" tIns="18288" bIns="18288" anchor="t">
             <a:spAutoFit/>
           </a:bodyPr>
           <a:lstStyle/>
@@ -3125,7 +3125,7 @@
               </a:spcAft>
             </a:pPr>
             <a:r>
-              <a:rPr sz="2100" b="0" i="0">
+              <a:rPr sz="1900" b="1" i="0">
                 <a:solidFill>
                   <a:srgbClr val="8EDBD4"/>
                 </a:solidFill>
@@ -3136,23 +3136,20 @@
           </a:p>
         </p:txBody>
       </p:sp>
-      <p:sp>
-        <p:nvSpPr>
-          <p:cNvPr id="3" name="C3-E22 rect 1" descr="sci-ppt:o001"/>
-          <p:cNvSpPr/>
+      <p:cxnSp>
+        <p:nvCxnSpPr>
+          <p:cNvPr id="3" name="C3-E22 line 1" descr="sci-ppt:o001"/>
+          <p:cNvCxnSpPr/>
           <p:nvPr/>
-        </p:nvSpPr>
-        <p:spPr>
-          <a:xfrm>
-            <a:off x="731520" y="1508760"/>
-            <a:ext cx="4937760" cy="731520"/>
-          </a:xfrm>
-          <a:prstGeom prst="rect">
+        </p:nvCxnSpPr>
+        <p:spPr>
+          <a:xfrm>
+            <a:off x="914400" y="5029200"/>
+            <a:ext cx="5852160" cy="0"/>
+          </a:xfrm>
+          <a:prstGeom prst="line">
             <a:avLst/>
           </a:prstGeom>
-          <a:solidFill>
-            <a:srgbClr val="213E4B"/>
-          </a:solidFill>
           <a:ln w="19050">
             <a:solidFill>
               <a:srgbClr val="B4C7D2"/>
@@ -3160,78 +3157,51 @@
           </a:ln>
           <a:effectLst/>
         </p:spPr>
-        <p:txBody>
-          <a:bodyPr rtlCol="0" anchor="ctr"/>
-          <a:lstStyle/>
-          <a:p>
-            <a:pPr algn="ctr"/>
-          </a:p>
-        </p:txBody>
-      </p:sp>
+      </p:cxnSp>
       <p:cxnSp>
         <p:nvCxnSpPr>
-          <p:cNvPr id="4" name="C3-E22 arrow 2" descr="sci-ppt:o002"/>
+          <p:cNvPr id="4" name="C3-E22 line 2" descr="sci-ppt:o002"/>
           <p:cNvCxnSpPr/>
           <p:nvPr/>
         </p:nvCxnSpPr>
         <p:spPr>
           <a:xfrm>
-            <a:off x="1005840" y="1874519"/>
-            <a:ext cx="4297680" cy="0"/>
+            <a:off x="914400" y="1371600"/>
+            <a:ext cx="0" cy="3657600"/>
           </a:xfrm>
           <a:prstGeom prst="line">
             <a:avLst/>
           </a:prstGeom>
-          <a:ln w="25400">
+          <a:ln w="19050">
             <a:solidFill>
-              <a:srgbClr val="8EDBD4"/>
+              <a:srgbClr val="B4C7D2"/>
             </a:solidFill>
-            <a:headEnd type="none" w="med" len="med"/>
-            <a:tailEnd type="triangle" w="med" len="med"/>
           </a:ln>
           <a:effectLst/>
         </p:spPr>
       </p:cxnSp>
-      <p:sp>
-        <p:nvSpPr>
-          <p:cNvPr id="5" name="C3-E22 text 3" descr="sci-ppt:o003"/>
-          <p:cNvSpPr txBox="1"/>
+      <p:cxnSp>
+        <p:nvCxnSpPr>
+          <p:cNvPr id="5" name="C3-E22 line 3" descr="sci-ppt:o003"/>
+          <p:cNvCxnSpPr/>
           <p:nvPr/>
-        </p:nvSpPr>
-        <p:spPr>
-          <a:xfrm>
-            <a:off x="1463040" y="1051560"/>
-            <a:ext cx="3931920" cy="365760"/>
-          </a:xfrm>
-          <a:prstGeom prst="rect">
+        </p:nvCxnSpPr>
+        <p:spPr>
+          <a:xfrm>
+            <a:off x="914400" y="5029200"/>
+            <a:ext cx="0" cy="64008"/>
+          </a:xfrm>
+          <a:prstGeom prst="line">
             <a:avLst/>
           </a:prstGeom>
-          <a:noFill/>
+          <a:ln w="12700">
+            <a:solidFill>
+              <a:srgbClr val="B4C7D2"/>
+            </a:solidFill>
+          </a:ln>
           <a:effectLst/>
         </p:spPr>
-        <p:txBody>
-          <a:bodyPr wrap="square" lIns="27432" rIns="27432" tIns="18288" bIns="18288" anchor="ctr">
-            <a:spAutoFit/>
-          </a:bodyPr>
-          <a:lstStyle/>
-          <a:p>
-            <a:pPr algn="l">
-              <a:spcAft>
-                <a:spcPts val="0"/>
-              </a:spcAft>
-            </a:pPr>
-            <a:r>
-              <a:rPr sz="1800" b="0" i="0">
-                <a:solidFill>
-                  <a:srgbClr val="E7F0F3"/>
-                </a:solidFill>
-                <a:latin typeface="Arial"/>
-              </a:rPr>
-              <a:t>Finite emitted liquid: m_j, E_j, U_j</a:t>
-            </a:r>
-          </a:p>
-        </p:txBody>
-      </p:sp>
+      </p:cxnSp>
       <p:cxnSp>
         <p:nvCxnSpPr>
           <p:cNvPr id="6" name="C3-E22 line 4" descr="sci-ppt:o004"/>
@@ -3240,15 +3210,15 @@
         </p:nvCxnSpPr>
         <p:spPr>
           <a:xfrm>
-            <a:off x="731520" y="2606040"/>
-            <a:ext cx="4937760" cy="0"/>
+            <a:off x="914400" y="1371600"/>
+            <a:ext cx="0" cy="3657600"/>
           </a:xfrm>
           <a:prstGeom prst="line">
             <a:avLst/>
           </a:prstGeom>
-          <a:ln w="25400">
+          <a:ln w="7620">
             <a:solidFill>
-              <a:srgbClr val="8EDBD4"/>
+              <a:srgbClr val="2E4756"/>
             </a:solidFill>
           </a:ln>
           <a:effectLst/>
@@ -3262,8 +3232,8 @@
         </p:nvSpPr>
         <p:spPr>
           <a:xfrm>
-            <a:off x="2743200" y="2697480"/>
-            <a:ext cx="1828800" cy="365760"/>
+            <a:off x="457200" y="5111496"/>
+            <a:ext cx="914400" cy="208407"/>
           </a:xfrm>
           <a:prstGeom prst="rect">
             <a:avLst/>
@@ -3272,24 +3242,24 @@
           <a:effectLst/>
         </p:spPr>
         <p:txBody>
-          <a:bodyPr wrap="square" lIns="27432" rIns="27432" tIns="18288" bIns="18288" anchor="ctr">
+          <a:bodyPr wrap="none" lIns="18288" rIns="18288" tIns="18288" bIns="18288" anchor="t">
             <a:spAutoFit/>
           </a:bodyPr>
           <a:lstStyle/>
           <a:p>
-            <a:pPr algn="l">
+            <a:pPr algn="ctr">
               <a:spcAft>
                 <a:spcPts val="0"/>
               </a:spcAft>
             </a:pPr>
             <a:r>
-              <a:rPr sz="1700" b="0" i="0">
+              <a:rPr sz="1050" b="0" i="0">
                 <a:solidFill>
-                  <a:srgbClr val="E7F0F3"/>
+                  <a:srgbClr val="B4C7D2"/>
                 </a:solidFill>
                 <a:latin typeface="Arial"/>
               </a:rPr>
-              <a:t>L_j</a:t>
+              <a:t>0</a:t>
             </a:r>
           </a:p>
         </p:txBody>
@@ -3302,30 +3272,52 @@
         </p:nvCxnSpPr>
         <p:spPr>
           <a:xfrm>
-            <a:off x="457200" y="1508760"/>
-            <a:ext cx="0" cy="731520"/>
+            <a:off x="2377440" y="5029200"/>
+            <a:ext cx="0" cy="64008"/>
           </a:xfrm>
           <a:prstGeom prst="line">
             <a:avLst/>
           </a:prstGeom>
-          <a:ln w="25400">
+          <a:ln w="12700">
             <a:solidFill>
-              <a:srgbClr val="8EDBD4"/>
+              <a:srgbClr val="B4C7D2"/>
             </a:solidFill>
           </a:ln>
           <a:effectLst/>
         </p:spPr>
       </p:cxnSp>
-      <p:sp>
-        <p:nvSpPr>
-          <p:cNvPr id="9" name="C3-E22 text 7" descr="sci-ppt:o007"/>
+      <p:cxnSp>
+        <p:nvCxnSpPr>
+          <p:cNvPr id="9" name="C3-E22 line 7" descr="sci-ppt:o007"/>
+          <p:cNvCxnSpPr/>
+          <p:nvPr/>
+        </p:nvCxnSpPr>
+        <p:spPr>
+          <a:xfrm>
+            <a:off x="2377440" y="1371600"/>
+            <a:ext cx="0" cy="3657600"/>
+          </a:xfrm>
+          <a:prstGeom prst="line">
+            <a:avLst/>
+          </a:prstGeom>
+          <a:ln w="7620">
+            <a:solidFill>
+              <a:srgbClr val="2E4756"/>
+            </a:solidFill>
+          </a:ln>
+          <a:effectLst/>
+        </p:spPr>
+      </p:cxnSp>
+      <p:sp>
+        <p:nvSpPr>
+          <p:cNvPr id="10" name="C3-E22 text 8" descr="sci-ppt:o008"/>
           <p:cNvSpPr txBox="1"/>
           <p:nvPr/>
         </p:nvSpPr>
         <p:spPr>
           <a:xfrm>
-            <a:off x="137160" y="2377440"/>
-            <a:ext cx="1645920" cy="320040"/>
+            <a:off x="1920240" y="5111496"/>
+            <a:ext cx="914400" cy="208407"/>
           </a:xfrm>
           <a:prstGeom prst="rect">
             <a:avLst/>
@@ -3334,94 +3326,82 @@
           <a:effectLst/>
         </p:spPr>
         <p:txBody>
-          <a:bodyPr wrap="square" lIns="27432" rIns="27432" tIns="18288" bIns="18288" anchor="ctr">
+          <a:bodyPr wrap="none" lIns="18288" rIns="18288" tIns="18288" bIns="18288" anchor="t">
             <a:spAutoFit/>
           </a:bodyPr>
           <a:lstStyle/>
           <a:p>
-            <a:pPr algn="l">
+            <a:pPr algn="ctr">
               <a:spcAft>
                 <a:spcPts val="0"/>
               </a:spcAft>
             </a:pPr>
             <a:r>
-              <a:rPr sz="1400" b="0" i="0">
+              <a:rPr sz="1050" b="0" i="0">
                 <a:solidFill>
-                  <a:srgbClr val="E7F0F3"/>
+                  <a:srgbClr val="B4C7D2"/>
                 </a:solidFill>
                 <a:latin typeface="Arial"/>
               </a:rPr>
-              <a:t>d_j = 2a_j</a:t>
+              <a:t>5</a:t>
             </a:r>
           </a:p>
         </p:txBody>
       </p:sp>
       <p:cxnSp>
         <p:nvCxnSpPr>
-          <p:cNvPr id="10" name="C3-E22 arrow 8" descr="sci-ppt:o008"/>
+          <p:cNvPr id="11" name="C3-E22 line 9" descr="sci-ppt:o009"/>
           <p:cNvCxnSpPr/>
           <p:nvPr/>
         </p:nvCxnSpPr>
         <p:spPr>
           <a:xfrm>
-            <a:off x="5760720" y="1874519"/>
-            <a:ext cx="4754880" cy="0"/>
+            <a:off x="3840480" y="5029200"/>
+            <a:ext cx="0" cy="64008"/>
           </a:xfrm>
           <a:prstGeom prst="line">
             <a:avLst/>
           </a:prstGeom>
-          <a:ln w="25400">
-            <a:solidFill>
-              <a:srgbClr val="8EDBD4"/>
-            </a:solidFill>
-            <a:headEnd type="none" w="med" len="med"/>
-            <a:tailEnd type="triangle" w="med" len="med"/>
-          </a:ln>
-          <a:effectLst/>
-        </p:spPr>
-      </p:cxnSp>
-      <p:sp>
-        <p:nvSpPr>
-          <p:cNvPr id="11" name="C3-E22 rect 9" descr="sci-ppt:o009"/>
-          <p:cNvSpPr/>
-          <p:nvPr/>
-        </p:nvSpPr>
-        <p:spPr>
-          <a:xfrm>
-            <a:off x="10607040" y="1051560"/>
-            <a:ext cx="182880" cy="2194560"/>
-          </a:xfrm>
-          <a:prstGeom prst="rect">
-            <a:avLst/>
-          </a:prstGeom>
-          <a:solidFill>
-            <a:srgbClr val="213E4B"/>
-          </a:solidFill>
-          <a:ln w="19050">
+          <a:ln w="12700">
             <a:solidFill>
               <a:srgbClr val="B4C7D2"/>
             </a:solidFill>
           </a:ln>
           <a:effectLst/>
         </p:spPr>
-        <p:txBody>
-          <a:bodyPr rtlCol="0" anchor="ctr"/>
-          <a:lstStyle/>
-          <a:p>
-            <a:pPr algn="ctr"/>
-          </a:p>
-        </p:txBody>
-      </p:sp>
-      <p:sp>
-        <p:nvSpPr>
-          <p:cNvPr id="12" name="C3-E22 text 10" descr="sci-ppt:o010"/>
+      </p:cxnSp>
+      <p:cxnSp>
+        <p:nvCxnSpPr>
+          <p:cNvPr id="12" name="C3-E22 line 10" descr="sci-ppt:o010"/>
+          <p:cNvCxnSpPr/>
+          <p:nvPr/>
+        </p:nvCxnSpPr>
+        <p:spPr>
+          <a:xfrm>
+            <a:off x="3840480" y="1371600"/>
+            <a:ext cx="0" cy="3657600"/>
+          </a:xfrm>
+          <a:prstGeom prst="line">
+            <a:avLst/>
+          </a:prstGeom>
+          <a:ln w="7620">
+            <a:solidFill>
+              <a:srgbClr val="2E4756"/>
+            </a:solidFill>
+          </a:ln>
+          <a:effectLst/>
+        </p:spPr>
+      </p:cxnSp>
+      <p:sp>
+        <p:nvSpPr>
+          <p:cNvPr id="13" name="C3-E22 text 11" descr="sci-ppt:o011"/>
           <p:cNvSpPr txBox="1"/>
           <p:nvPr/>
         </p:nvSpPr>
         <p:spPr>
           <a:xfrm>
-            <a:off x="7315200" y="2286000"/>
-            <a:ext cx="1828800" cy="365760"/>
+            <a:off x="3383280" y="5111496"/>
+            <a:ext cx="914400" cy="208407"/>
           </a:xfrm>
           <a:prstGeom prst="rect">
             <a:avLst/>
@@ -3430,50 +3410,28 @@
           <a:effectLst/>
         </p:spPr>
         <p:txBody>
-          <a:bodyPr wrap="square" lIns="27432" rIns="27432" tIns="18288" bIns="18288" anchor="ctr">
+          <a:bodyPr wrap="none" lIns="18288" rIns="18288" tIns="18288" bIns="18288" anchor="t">
             <a:spAutoFit/>
           </a:bodyPr>
           <a:lstStyle/>
           <a:p>
-            <a:pPr algn="l">
+            <a:pPr algn="ctr">
               <a:spcAft>
                 <a:spcPts val="0"/>
               </a:spcAft>
             </a:pPr>
             <a:r>
-              <a:rPr sz="1700" b="0" i="0">
+              <a:rPr sz="1050" b="0" i="0">
                 <a:solidFill>
-                  <a:srgbClr val="E7F0F3"/>
+                  <a:srgbClr val="B4C7D2"/>
                 </a:solidFill>
                 <a:latin typeface="Arial"/>
               </a:rPr>
-              <a:t>Gap H</a:t>
-            </a:r>
-          </a:p>
-        </p:txBody>
-      </p:sp>
-      <p:cxnSp>
-        <p:nvCxnSpPr>
-          <p:cNvPr id="13" name="C3-E22 line 11" descr="sci-ppt:o011"/>
-          <p:cNvCxnSpPr/>
-          <p:nvPr/>
-        </p:nvCxnSpPr>
-        <p:spPr>
-          <a:xfrm>
-            <a:off x="5943600" y="1417319"/>
-            <a:ext cx="59436" cy="376"/>
-          </a:xfrm>
-          <a:prstGeom prst="line">
-            <a:avLst/>
-          </a:prstGeom>
-          <a:ln w="25400">
-            <a:solidFill>
-              <a:srgbClr val="8EDBD4"/>
-            </a:solidFill>
-          </a:ln>
-          <a:effectLst/>
-        </p:spPr>
-      </p:cxnSp>
+              <a:t>10</a:t>
+            </a:r>
+          </a:p>
+        </p:txBody>
+      </p:sp>
       <p:cxnSp>
         <p:nvCxnSpPr>
           <p:cNvPr id="14" name="C3-E22 line 12" descr="sci-ppt:o012"/>
@@ -3482,15 +3440,15 @@
         </p:nvCxnSpPr>
         <p:spPr>
           <a:xfrm>
-            <a:off x="6003036" y="1417695"/>
-            <a:ext cx="59436" cy="7407"/>
+            <a:off x="5303520" y="5029200"/>
+            <a:ext cx="0" cy="64008"/>
           </a:xfrm>
           <a:prstGeom prst="line">
             <a:avLst/>
           </a:prstGeom>
-          <a:ln w="25400">
+          <a:ln w="12700">
             <a:solidFill>
-              <a:srgbClr val="8EDBD4"/>
+              <a:srgbClr val="B4C7D2"/>
             </a:solidFill>
           </a:ln>
           <a:effectLst/>
@@ -3504,42 +3462,60 @@
         </p:nvCxnSpPr>
         <p:spPr>
           <a:xfrm>
-            <a:off x="6062472" y="1425102"/>
-            <a:ext cx="59436" cy="14305"/>
+            <a:off x="5303520" y="1371600"/>
+            <a:ext cx="0" cy="3657600"/>
           </a:xfrm>
           <a:prstGeom prst="line">
             <a:avLst/>
           </a:prstGeom>
-          <a:ln w="25400">
+          <a:ln w="7620">
             <a:solidFill>
-              <a:srgbClr val="8EDBD4"/>
+              <a:srgbClr val="2E4756"/>
             </a:solidFill>
           </a:ln>
           <a:effectLst/>
         </p:spPr>
       </p:cxnSp>
-      <p:cxnSp>
-        <p:nvCxnSpPr>
-          <p:cNvPr id="16" name="C3-E22 line 14" descr="sci-ppt:o014"/>
-          <p:cNvCxnSpPr/>
+      <p:sp>
+        <p:nvSpPr>
+          <p:cNvPr id="16" name="C3-E22 text 14" descr="sci-ppt:o014"/>
+          <p:cNvSpPr txBox="1"/>
           <p:nvPr/>
-        </p:nvCxnSpPr>
-        <p:spPr>
-          <a:xfrm>
-            <a:off x="6121908" y="1439407"/>
-            <a:ext cx="59436" cy="20508"/>
-          </a:xfrm>
-          <a:prstGeom prst="line">
+        </p:nvSpPr>
+        <p:spPr>
+          <a:xfrm>
+            <a:off x="4846320" y="5111496"/>
+            <a:ext cx="914400" cy="208407"/>
+          </a:xfrm>
+          <a:prstGeom prst="rect">
             <a:avLst/>
           </a:prstGeom>
-          <a:ln w="25400">
-            <a:solidFill>
-              <a:srgbClr val="8EDBD4"/>
-            </a:solidFill>
-          </a:ln>
+          <a:noFill/>
           <a:effectLst/>
         </p:spPr>
-      </p:cxnSp>
+        <p:txBody>
+          <a:bodyPr wrap="none" lIns="18288" rIns="18288" tIns="18288" bIns="18288" anchor="t">
+            <a:spAutoFit/>
+          </a:bodyPr>
+          <a:lstStyle/>
+          <a:p>
+            <a:pPr algn="ctr">
+              <a:spcAft>
+                <a:spcPts val="0"/>
+              </a:spcAft>
+            </a:pPr>
+            <a:r>
+              <a:rPr sz="1050" b="0" i="0">
+                <a:solidFill>
+                  <a:srgbClr val="B4C7D2"/>
+                </a:solidFill>
+                <a:latin typeface="Arial"/>
+              </a:rPr>
+              <a:t>15</a:t>
+            </a:r>
+          </a:p>
+        </p:txBody>
+      </p:sp>
       <p:cxnSp>
         <p:nvCxnSpPr>
           <p:cNvPr id="17" name="C3-E22 line 15" descr="sci-ppt:o015"/>
@@ -3548,15 +3524,15 @@
         </p:nvCxnSpPr>
         <p:spPr>
           <a:xfrm>
-            <a:off x="6181344" y="1459915"/>
-            <a:ext cx="59436" cy="25481"/>
+            <a:off x="6766560" y="5029200"/>
+            <a:ext cx="0" cy="64008"/>
           </a:xfrm>
           <a:prstGeom prst="line">
             <a:avLst/>
           </a:prstGeom>
-          <a:ln w="25400">
+          <a:ln w="12700">
             <a:solidFill>
-              <a:srgbClr val="8EDBD4"/>
+              <a:srgbClr val="B4C7D2"/>
             </a:solidFill>
           </a:ln>
           <a:effectLst/>
@@ -3570,42 +3546,60 @@
         </p:nvCxnSpPr>
         <p:spPr>
           <a:xfrm>
-            <a:off x="6240780" y="1485396"/>
-            <a:ext cx="59436" cy="28760"/>
+            <a:off x="6766560" y="1371600"/>
+            <a:ext cx="0" cy="3657600"/>
           </a:xfrm>
           <a:prstGeom prst="line">
             <a:avLst/>
           </a:prstGeom>
-          <a:ln w="25400">
+          <a:ln w="7620">
             <a:solidFill>
-              <a:srgbClr val="8EDBD4"/>
+              <a:srgbClr val="2E4756"/>
             </a:solidFill>
           </a:ln>
           <a:effectLst/>
         </p:spPr>
       </p:cxnSp>
-      <p:cxnSp>
-        <p:nvCxnSpPr>
-          <p:cNvPr id="19" name="C3-E22 line 17" descr="sci-ppt:o017"/>
-          <p:cNvCxnSpPr/>
+      <p:sp>
+        <p:nvSpPr>
+          <p:cNvPr id="19" name="C3-E22 text 17" descr="sci-ppt:o017"/>
+          <p:cNvSpPr txBox="1"/>
           <p:nvPr/>
-        </p:nvCxnSpPr>
-        <p:spPr>
-          <a:xfrm>
-            <a:off x="6300216" y="1514156"/>
-            <a:ext cx="59436" cy="29994"/>
-          </a:xfrm>
-          <a:prstGeom prst="line">
+        </p:nvSpPr>
+        <p:spPr>
+          <a:xfrm>
+            <a:off x="6309360" y="5111496"/>
+            <a:ext cx="914400" cy="208407"/>
+          </a:xfrm>
+          <a:prstGeom prst="rect">
             <a:avLst/>
           </a:prstGeom>
-          <a:ln w="25400">
-            <a:solidFill>
-              <a:srgbClr val="8EDBD4"/>
-            </a:solidFill>
-          </a:ln>
+          <a:noFill/>
           <a:effectLst/>
         </p:spPr>
-      </p:cxnSp>
+        <p:txBody>
+          <a:bodyPr wrap="none" lIns="18288" rIns="18288" tIns="18288" bIns="18288" anchor="t">
+            <a:spAutoFit/>
+          </a:bodyPr>
+          <a:lstStyle/>
+          <a:p>
+            <a:pPr algn="ctr">
+              <a:spcAft>
+                <a:spcPts val="0"/>
+              </a:spcAft>
+            </a:pPr>
+            <a:r>
+              <a:rPr sz="1050" b="0" i="0">
+                <a:solidFill>
+                  <a:srgbClr val="B4C7D2"/>
+                </a:solidFill>
+                <a:latin typeface="Arial"/>
+              </a:rPr>
+              <a:t>20</a:t>
+            </a:r>
+          </a:p>
+        </p:txBody>
+      </p:sp>
       <p:cxnSp>
         <p:nvCxnSpPr>
           <p:cNvPr id="20" name="C3-E22 line 18" descr="sci-ppt:o018"/>
@@ -3614,15 +3608,15 @@
         </p:nvCxnSpPr>
         <p:spPr>
           <a:xfrm>
-            <a:off x="6359652" y="1544150"/>
-            <a:ext cx="59436" cy="28973"/>
+            <a:off x="850392" y="4584713"/>
+            <a:ext cx="64008" cy="0"/>
           </a:xfrm>
           <a:prstGeom prst="line">
             <a:avLst/>
           </a:prstGeom>
-          <a:ln w="25400">
+          <a:ln w="12700">
             <a:solidFill>
-              <a:srgbClr val="8EDBD4"/>
+              <a:srgbClr val="B4C7D2"/>
             </a:solidFill>
           </a:ln>
           <a:effectLst/>
@@ -3636,42 +3630,60 @@
         </p:nvCxnSpPr>
         <p:spPr>
           <a:xfrm>
-            <a:off x="6419088" y="1573123"/>
-            <a:ext cx="59436" cy="25661"/>
+            <a:off x="914400" y="4584713"/>
+            <a:ext cx="5852160" cy="0"/>
           </a:xfrm>
           <a:prstGeom prst="line">
             <a:avLst/>
           </a:prstGeom>
-          <a:ln w="25400">
+          <a:ln w="7620">
             <a:solidFill>
-              <a:srgbClr val="8EDBD4"/>
+              <a:srgbClr val="2E4756"/>
             </a:solidFill>
           </a:ln>
           <a:effectLst/>
         </p:spPr>
       </p:cxnSp>
-      <p:cxnSp>
-        <p:nvCxnSpPr>
-          <p:cNvPr id="22" name="C3-E22 line 20" descr="sci-ppt:o020"/>
-          <p:cNvCxnSpPr/>
+      <p:sp>
+        <p:nvSpPr>
+          <p:cNvPr id="22" name="C3-E22 text 20" descr="sci-ppt:o020"/>
+          <p:cNvSpPr txBox="1"/>
           <p:nvPr/>
-        </p:nvCxnSpPr>
-        <p:spPr>
-          <a:xfrm>
-            <a:off x="6478524" y="1598784"/>
-            <a:ext cx="59436" cy="20200"/>
-          </a:xfrm>
-          <a:prstGeom prst="line">
+        </p:nvSpPr>
+        <p:spPr>
+          <a:xfrm>
+            <a:off x="45720" y="4502417"/>
+            <a:ext cx="777240" cy="208407"/>
+          </a:xfrm>
+          <a:prstGeom prst="rect">
             <a:avLst/>
           </a:prstGeom>
-          <a:ln w="25400">
-            <a:solidFill>
-              <a:srgbClr val="8EDBD4"/>
-            </a:solidFill>
-          </a:ln>
+          <a:noFill/>
           <a:effectLst/>
         </p:spPr>
-      </p:cxnSp>
+        <p:txBody>
+          <a:bodyPr wrap="none" lIns="18288" rIns="18288" tIns="18288" bIns="18288" anchor="t">
+            <a:spAutoFit/>
+          </a:bodyPr>
+          <a:lstStyle/>
+          <a:p>
+            <a:pPr algn="r">
+              <a:spcAft>
+                <a:spcPts val="0"/>
+              </a:spcAft>
+            </a:pPr>
+            <a:r>
+              <a:rPr sz="1050" b="0" i="0">
+                <a:solidFill>
+                  <a:srgbClr val="B4C7D2"/>
+                </a:solidFill>
+                <a:latin typeface="Arial"/>
+              </a:rPr>
+              <a:t>0.01</a:t>
+            </a:r>
+          </a:p>
+        </p:txBody>
+      </p:sp>
       <p:cxnSp>
         <p:nvCxnSpPr>
           <p:cNvPr id="23" name="C3-E22 line 21" descr="sci-ppt:o021"/>
@@ -3680,15 +3692,15 @@
         </p:nvCxnSpPr>
         <p:spPr>
           <a:xfrm>
-            <a:off x="6537960" y="1618984"/>
-            <a:ext cx="59436" cy="12908"/>
+            <a:off x="850392" y="3108160"/>
+            <a:ext cx="64008" cy="0"/>
           </a:xfrm>
           <a:prstGeom prst="line">
             <a:avLst/>
           </a:prstGeom>
-          <a:ln w="25400">
+          <a:ln w="12700">
             <a:solidFill>
-              <a:srgbClr val="8EDBD4"/>
+              <a:srgbClr val="B4C7D2"/>
             </a:solidFill>
           </a:ln>
           <a:effectLst/>
@@ -3702,42 +3714,60 @@
         </p:nvCxnSpPr>
         <p:spPr>
           <a:xfrm>
-            <a:off x="6597396" y="1631892"/>
-            <a:ext cx="59436" cy="4264"/>
+            <a:off x="914400" y="3108160"/>
+            <a:ext cx="5852160" cy="0"/>
           </a:xfrm>
           <a:prstGeom prst="line">
             <a:avLst/>
           </a:prstGeom>
-          <a:ln w="25400">
+          <a:ln w="7620">
             <a:solidFill>
-              <a:srgbClr val="8EDBD4"/>
+              <a:srgbClr val="2E4756"/>
             </a:solidFill>
           </a:ln>
           <a:effectLst/>
         </p:spPr>
       </p:cxnSp>
-      <p:cxnSp>
-        <p:nvCxnSpPr>
-          <p:cNvPr id="25" name="C3-E22 line 23" descr="sci-ppt:o023"/>
-          <p:cNvCxnSpPr/>
+      <p:sp>
+        <p:nvSpPr>
+          <p:cNvPr id="25" name="C3-E22 text 23" descr="sci-ppt:o023"/>
+          <p:cNvSpPr txBox="1"/>
           <p:nvPr/>
-        </p:nvCxnSpPr>
-        <p:spPr>
-          <a:xfrm flipV="1">
-            <a:off x="6656832" y="1631029"/>
-            <a:ext cx="59436" cy="5127"/>
-          </a:xfrm>
-          <a:prstGeom prst="line">
+        </p:nvSpPr>
+        <p:spPr>
+          <a:xfrm>
+            <a:off x="45720" y="3025864"/>
+            <a:ext cx="777240" cy="208407"/>
+          </a:xfrm>
+          <a:prstGeom prst="rect">
             <a:avLst/>
           </a:prstGeom>
-          <a:ln w="25400">
-            <a:solidFill>
-              <a:srgbClr val="8EDBD4"/>
-            </a:solidFill>
-          </a:ln>
+          <a:noFill/>
           <a:effectLst/>
         </p:spPr>
-      </p:cxnSp>
+        <p:txBody>
+          <a:bodyPr wrap="none" lIns="18288" rIns="18288" tIns="18288" bIns="18288" anchor="t">
+            <a:spAutoFit/>
+          </a:bodyPr>
+          <a:lstStyle/>
+          <a:p>
+            <a:pPr algn="r">
+              <a:spcAft>
+                <a:spcPts val="0"/>
+              </a:spcAft>
+            </a:pPr>
+            <a:r>
+              <a:rPr sz="1050" b="0" i="0">
+                <a:solidFill>
+                  <a:srgbClr val="B4C7D2"/>
+                </a:solidFill>
+                <a:latin typeface="Arial"/>
+              </a:rPr>
+              <a:t>0.1</a:t>
+            </a:r>
+          </a:p>
+        </p:txBody>
+      </p:sp>
       <p:cxnSp>
         <p:nvCxnSpPr>
           <p:cNvPr id="26" name="C3-E22 line 24" descr="sci-ppt:o024"/>
@@ -3745,16 +3775,16 @@
           <p:nvPr/>
         </p:nvCxnSpPr>
         <p:spPr>
-          <a:xfrm flipV="1">
-            <a:off x="6716268" y="1616458"/>
-            <a:ext cx="59436" cy="14571"/>
+          <a:xfrm>
+            <a:off x="850392" y="1631608"/>
+            <a:ext cx="64008" cy="0"/>
           </a:xfrm>
           <a:prstGeom prst="line">
             <a:avLst/>
           </a:prstGeom>
-          <a:ln w="25400">
+          <a:ln w="12700">
             <a:solidFill>
-              <a:srgbClr val="8EDBD4"/>
+              <a:srgbClr val="B4C7D2"/>
             </a:solidFill>
           </a:ln>
           <a:effectLst/>
@@ -3767,109 +3797,611 @@
           <p:nvPr/>
         </p:nvCxnSpPr>
         <p:spPr>
-          <a:xfrm flipV="1">
-            <a:off x="6775704" y="1593113"/>
-            <a:ext cx="59436" cy="23345"/>
+          <a:xfrm>
+            <a:off x="914400" y="1631608"/>
+            <a:ext cx="5852160" cy="0"/>
           </a:xfrm>
           <a:prstGeom prst="line">
             <a:avLst/>
           </a:prstGeom>
-          <a:ln w="25400">
+          <a:ln w="7620">
+            <a:solidFill>
+              <a:srgbClr val="2E4756"/>
+            </a:solidFill>
+          </a:ln>
+          <a:effectLst/>
+        </p:spPr>
+      </p:cxnSp>
+      <p:sp>
+        <p:nvSpPr>
+          <p:cNvPr id="28" name="C3-E22 text 26" descr="sci-ppt:o026"/>
+          <p:cNvSpPr txBox="1"/>
+          <p:nvPr/>
+        </p:nvSpPr>
+        <p:spPr>
+          <a:xfrm>
+            <a:off x="45720" y="1549312"/>
+            <a:ext cx="777240" cy="208407"/>
+          </a:xfrm>
+          <a:prstGeom prst="rect">
+            <a:avLst/>
+          </a:prstGeom>
+          <a:noFill/>
+          <a:effectLst/>
+        </p:spPr>
+        <p:txBody>
+          <a:bodyPr wrap="none" lIns="18288" rIns="18288" tIns="18288" bIns="18288" anchor="t">
+            <a:spAutoFit/>
+          </a:bodyPr>
+          <a:lstStyle/>
+          <a:p>
+            <a:pPr algn="r">
+              <a:spcAft>
+                <a:spcPts val="0"/>
+              </a:spcAft>
+            </a:pPr>
+            <a:r>
+              <a:rPr sz="1050" b="0" i="0">
+                <a:solidFill>
+                  <a:srgbClr val="B4C7D2"/>
+                </a:solidFill>
+                <a:latin typeface="Arial"/>
+              </a:rPr>
+              <a:t>1</a:t>
+            </a:r>
+          </a:p>
+        </p:txBody>
+      </p:sp>
+      <p:sp>
+        <p:nvSpPr>
+          <p:cNvPr id="29" name="C3-E22 text 27" descr="sci-ppt:o027"/>
+          <p:cNvSpPr txBox="1"/>
+          <p:nvPr/>
+        </p:nvSpPr>
+        <p:spPr>
+          <a:xfrm>
+            <a:off x="914400" y="5312664"/>
+            <a:ext cx="5852160" cy="231648"/>
+          </a:xfrm>
+          <a:prstGeom prst="rect">
+            <a:avLst/>
+          </a:prstGeom>
+          <a:noFill/>
+          <a:effectLst/>
+        </p:spPr>
+        <p:txBody>
+          <a:bodyPr wrap="none" lIns="18288" rIns="18288" tIns="18288" bIns="18288" anchor="t">
+            <a:spAutoFit/>
+          </a:bodyPr>
+          <a:lstStyle/>
+          <a:p>
+            <a:pPr algn="ctr">
+              <a:spcAft>
+                <a:spcPts val="0"/>
+              </a:spcAft>
+            </a:pPr>
+            <a:r>
+              <a:rPr sz="1200" b="0" i="0">
+                <a:solidFill>
+                  <a:srgbClr val="E7F0F3"/>
+                </a:solidFill>
+                <a:latin typeface="Arial"/>
+              </a:rPr>
+              <a:t>time  (µs)</a:t>
+            </a:r>
+          </a:p>
+        </p:txBody>
+      </p:sp>
+      <p:sp>
+        <p:nvSpPr>
+          <p:cNvPr id="30" name="C3-E22 text 28" descr="sci-ppt:o028"/>
+          <p:cNvSpPr txBox="1"/>
+          <p:nvPr/>
+        </p:nvSpPr>
+        <p:spPr>
+          <a:xfrm>
+            <a:off x="365760" y="1024128"/>
+            <a:ext cx="5852160" cy="231648"/>
+          </a:xfrm>
+          <a:prstGeom prst="rect">
+            <a:avLst/>
+          </a:prstGeom>
+          <a:noFill/>
+          <a:effectLst/>
+        </p:spPr>
+        <p:txBody>
+          <a:bodyPr wrap="none" lIns="18288" rIns="18288" tIns="18288" bIns="18288" anchor="t">
+            <a:spAutoFit/>
+          </a:bodyPr>
+          <a:lstStyle/>
+          <a:p>
+            <a:pPr algn="l">
+              <a:spcAft>
+                <a:spcPts val="0"/>
+              </a:spcAft>
+            </a:pPr>
+            <a:r>
+              <a:rPr sz="1200" b="0" i="0">
+                <a:solidFill>
+                  <a:srgbClr val="E7F0F3"/>
+                </a:solidFill>
+                <a:latin typeface="Arial"/>
+              </a:rPr>
+              <a:t>δ / a₀</a:t>
+            </a:r>
+          </a:p>
+        </p:txBody>
+      </p:sp>
+      <p:sp>
+        <p:nvSpPr>
+          <p:cNvPr id="31" name="C3-E22 polygon 29" descr="sci-ppt:o029"/>
+          <p:cNvSpPr/>
+          <p:nvPr/>
+        </p:nvSpPr>
+        <p:spPr>
+          <a:xfrm>
+            <a:off x="914400" y="1388082"/>
+            <a:ext cx="5597718" cy="3196631"/>
+          </a:xfrm>
+          <a:custGeom>
+            <a:avLst/>
+            <a:gdLst/>
+            <a:ahLst/>
+            <a:cxnLst/>
+            <a:rect l="l" t="t" r="r" b="b"/>
+            <a:pathLst>
+              <a:path w="5597718" h="3196631">
+                <a:moveTo>
+                  <a:pt x="0" y="3196631"/>
+                </a:moveTo>
+                <a:lnTo>
+                  <a:pt x="39144" y="3174277"/>
+                </a:lnTo>
+                <a:lnTo>
+                  <a:pt x="78289" y="3151923"/>
+                </a:lnTo>
+                <a:lnTo>
+                  <a:pt x="117434" y="3129569"/>
+                </a:lnTo>
+                <a:lnTo>
+                  <a:pt x="156579" y="3107215"/>
+                </a:lnTo>
+                <a:lnTo>
+                  <a:pt x="195724" y="3084861"/>
+                </a:lnTo>
+                <a:lnTo>
+                  <a:pt x="234869" y="3062506"/>
+                </a:lnTo>
+                <a:lnTo>
+                  <a:pt x="274014" y="3040152"/>
+                </a:lnTo>
+                <a:lnTo>
+                  <a:pt x="313159" y="3017798"/>
+                </a:lnTo>
+                <a:lnTo>
+                  <a:pt x="352303" y="2995444"/>
+                </a:lnTo>
+                <a:lnTo>
+                  <a:pt x="391448" y="2973090"/>
+                </a:lnTo>
+                <a:lnTo>
+                  <a:pt x="430593" y="2950736"/>
+                </a:lnTo>
+                <a:lnTo>
+                  <a:pt x="469738" y="2928382"/>
+                </a:lnTo>
+                <a:lnTo>
+                  <a:pt x="508883" y="2906028"/>
+                </a:lnTo>
+                <a:lnTo>
+                  <a:pt x="548028" y="2883674"/>
+                </a:lnTo>
+                <a:lnTo>
+                  <a:pt x="587173" y="2861320"/>
+                </a:lnTo>
+                <a:lnTo>
+                  <a:pt x="626318" y="2838966"/>
+                </a:lnTo>
+                <a:lnTo>
+                  <a:pt x="665463" y="2816612"/>
+                </a:lnTo>
+                <a:lnTo>
+                  <a:pt x="704607" y="2794258"/>
+                </a:lnTo>
+                <a:lnTo>
+                  <a:pt x="743752" y="2771904"/>
+                </a:lnTo>
+                <a:lnTo>
+                  <a:pt x="782897" y="2749550"/>
+                </a:lnTo>
+                <a:lnTo>
+                  <a:pt x="822042" y="2727196"/>
+                </a:lnTo>
+                <a:lnTo>
+                  <a:pt x="861187" y="2704842"/>
+                </a:lnTo>
+                <a:lnTo>
+                  <a:pt x="900332" y="2682487"/>
+                </a:lnTo>
+                <a:lnTo>
+                  <a:pt x="939477" y="2660133"/>
+                </a:lnTo>
+                <a:lnTo>
+                  <a:pt x="978622" y="2637779"/>
+                </a:lnTo>
+                <a:lnTo>
+                  <a:pt x="1017766" y="2615425"/>
+                </a:lnTo>
+                <a:lnTo>
+                  <a:pt x="1056911" y="2593071"/>
+                </a:lnTo>
+                <a:lnTo>
+                  <a:pt x="1096056" y="2570717"/>
+                </a:lnTo>
+                <a:lnTo>
+                  <a:pt x="1135201" y="2548363"/>
+                </a:lnTo>
+                <a:lnTo>
+                  <a:pt x="1174346" y="2526009"/>
+                </a:lnTo>
+                <a:lnTo>
+                  <a:pt x="1213491" y="2503655"/>
+                </a:lnTo>
+                <a:lnTo>
+                  <a:pt x="1252636" y="2481301"/>
+                </a:lnTo>
+                <a:lnTo>
+                  <a:pt x="1291781" y="2458947"/>
+                </a:lnTo>
+                <a:lnTo>
+                  <a:pt x="1330926" y="2436593"/>
+                </a:lnTo>
+                <a:lnTo>
+                  <a:pt x="1370070" y="2414239"/>
+                </a:lnTo>
+                <a:lnTo>
+                  <a:pt x="1409215" y="2391885"/>
+                </a:lnTo>
+                <a:lnTo>
+                  <a:pt x="1448360" y="2369531"/>
+                </a:lnTo>
+                <a:lnTo>
+                  <a:pt x="1487505" y="2347177"/>
+                </a:lnTo>
+                <a:lnTo>
+                  <a:pt x="1526650" y="2324822"/>
+                </a:lnTo>
+                <a:lnTo>
+                  <a:pt x="1565795" y="2302468"/>
+                </a:lnTo>
+                <a:lnTo>
+                  <a:pt x="1604940" y="2280114"/>
+                </a:lnTo>
+                <a:lnTo>
+                  <a:pt x="1644085" y="2257760"/>
+                </a:lnTo>
+                <a:lnTo>
+                  <a:pt x="1683229" y="2235406"/>
+                </a:lnTo>
+                <a:lnTo>
+                  <a:pt x="1722374" y="2213052"/>
+                </a:lnTo>
+                <a:lnTo>
+                  <a:pt x="1761519" y="2190698"/>
+                </a:lnTo>
+                <a:lnTo>
+                  <a:pt x="1800664" y="2168344"/>
+                </a:lnTo>
+                <a:lnTo>
+                  <a:pt x="1839809" y="2145990"/>
+                </a:lnTo>
+                <a:lnTo>
+                  <a:pt x="1878954" y="2123636"/>
+                </a:lnTo>
+                <a:lnTo>
+                  <a:pt x="1918099" y="2101282"/>
+                </a:lnTo>
+                <a:lnTo>
+                  <a:pt x="1957244" y="2078928"/>
+                </a:lnTo>
+                <a:lnTo>
+                  <a:pt x="1996389" y="2056574"/>
+                </a:lnTo>
+                <a:lnTo>
+                  <a:pt x="2035533" y="2034220"/>
+                </a:lnTo>
+                <a:lnTo>
+                  <a:pt x="2074678" y="2011866"/>
+                </a:lnTo>
+                <a:lnTo>
+                  <a:pt x="2113823" y="1989512"/>
+                </a:lnTo>
+                <a:lnTo>
+                  <a:pt x="2152968" y="1967157"/>
+                </a:lnTo>
+                <a:lnTo>
+                  <a:pt x="2192113" y="1944803"/>
+                </a:lnTo>
+                <a:lnTo>
+                  <a:pt x="2231258" y="1922449"/>
+                </a:lnTo>
+                <a:lnTo>
+                  <a:pt x="2270403" y="1900095"/>
+                </a:lnTo>
+                <a:lnTo>
+                  <a:pt x="2309548" y="1877741"/>
+                </a:lnTo>
+                <a:lnTo>
+                  <a:pt x="2348692" y="1855387"/>
+                </a:lnTo>
+                <a:lnTo>
+                  <a:pt x="2387837" y="1833033"/>
+                </a:lnTo>
+                <a:lnTo>
+                  <a:pt x="2426982" y="1810679"/>
+                </a:lnTo>
+                <a:lnTo>
+                  <a:pt x="2466127" y="1788325"/>
+                </a:lnTo>
+                <a:lnTo>
+                  <a:pt x="2505272" y="1765971"/>
+                </a:lnTo>
+                <a:lnTo>
+                  <a:pt x="2544417" y="1743617"/>
+                </a:lnTo>
+                <a:lnTo>
+                  <a:pt x="2583562" y="1721263"/>
+                </a:lnTo>
+                <a:lnTo>
+                  <a:pt x="2622707" y="1698909"/>
+                </a:lnTo>
+                <a:lnTo>
+                  <a:pt x="2661852" y="1676555"/>
+                </a:lnTo>
+                <a:lnTo>
+                  <a:pt x="2700996" y="1654201"/>
+                </a:lnTo>
+                <a:lnTo>
+                  <a:pt x="2740141" y="1631847"/>
+                </a:lnTo>
+                <a:lnTo>
+                  <a:pt x="2779286" y="1609493"/>
+                </a:lnTo>
+                <a:lnTo>
+                  <a:pt x="2818431" y="1587138"/>
+                </a:lnTo>
+                <a:lnTo>
+                  <a:pt x="2857576" y="1564784"/>
+                </a:lnTo>
+                <a:lnTo>
+                  <a:pt x="2896721" y="1542430"/>
+                </a:lnTo>
+                <a:lnTo>
+                  <a:pt x="2935866" y="1520076"/>
+                </a:lnTo>
+                <a:lnTo>
+                  <a:pt x="2975011" y="1497722"/>
+                </a:lnTo>
+                <a:lnTo>
+                  <a:pt x="3014155" y="1475368"/>
+                </a:lnTo>
+                <a:lnTo>
+                  <a:pt x="3053300" y="1453014"/>
+                </a:lnTo>
+                <a:lnTo>
+                  <a:pt x="3092445" y="1430660"/>
+                </a:lnTo>
+                <a:lnTo>
+                  <a:pt x="3131590" y="1408306"/>
+                </a:lnTo>
+                <a:lnTo>
+                  <a:pt x="3170735" y="1385952"/>
+                </a:lnTo>
+                <a:lnTo>
+                  <a:pt x="3209880" y="1363598"/>
+                </a:lnTo>
+                <a:lnTo>
+                  <a:pt x="3249025" y="1341244"/>
+                </a:lnTo>
+                <a:lnTo>
+                  <a:pt x="3288170" y="1318890"/>
+                </a:lnTo>
+                <a:lnTo>
+                  <a:pt x="3327315" y="1296536"/>
+                </a:lnTo>
+                <a:lnTo>
+                  <a:pt x="3366459" y="1274182"/>
+                </a:lnTo>
+                <a:lnTo>
+                  <a:pt x="3405604" y="1251828"/>
+                </a:lnTo>
+                <a:lnTo>
+                  <a:pt x="3444749" y="1229473"/>
+                </a:lnTo>
+                <a:lnTo>
+                  <a:pt x="3483894" y="1207119"/>
+                </a:lnTo>
+                <a:lnTo>
+                  <a:pt x="3523039" y="1184765"/>
+                </a:lnTo>
+                <a:lnTo>
+                  <a:pt x="3562184" y="1162411"/>
+                </a:lnTo>
+                <a:lnTo>
+                  <a:pt x="3601329" y="1140057"/>
+                </a:lnTo>
+                <a:lnTo>
+                  <a:pt x="3640474" y="1117703"/>
+                </a:lnTo>
+                <a:lnTo>
+                  <a:pt x="3679618" y="1095349"/>
+                </a:lnTo>
+                <a:lnTo>
+                  <a:pt x="3718763" y="1072995"/>
+                </a:lnTo>
+                <a:lnTo>
+                  <a:pt x="3757908" y="1050641"/>
+                </a:lnTo>
+                <a:lnTo>
+                  <a:pt x="3797053" y="1028287"/>
+                </a:lnTo>
+                <a:lnTo>
+                  <a:pt x="3836198" y="1005933"/>
+                </a:lnTo>
+                <a:lnTo>
+                  <a:pt x="3875343" y="983579"/>
+                </a:lnTo>
+                <a:lnTo>
+                  <a:pt x="3914488" y="961225"/>
+                </a:lnTo>
+                <a:lnTo>
+                  <a:pt x="3953633" y="938871"/>
+                </a:lnTo>
+                <a:lnTo>
+                  <a:pt x="3992778" y="916517"/>
+                </a:lnTo>
+                <a:lnTo>
+                  <a:pt x="4031922" y="894163"/>
+                </a:lnTo>
+                <a:lnTo>
+                  <a:pt x="4071067" y="871808"/>
+                </a:lnTo>
+                <a:lnTo>
+                  <a:pt x="4110212" y="849454"/>
+                </a:lnTo>
+                <a:lnTo>
+                  <a:pt x="4149357" y="827100"/>
+                </a:lnTo>
+                <a:lnTo>
+                  <a:pt x="4188502" y="804746"/>
+                </a:lnTo>
+                <a:lnTo>
+                  <a:pt x="4227647" y="782392"/>
+                </a:lnTo>
+                <a:lnTo>
+                  <a:pt x="4266792" y="760038"/>
+                </a:lnTo>
+                <a:lnTo>
+                  <a:pt x="4305937" y="737684"/>
+                </a:lnTo>
+                <a:lnTo>
+                  <a:pt x="4345082" y="715330"/>
+                </a:lnTo>
+                <a:lnTo>
+                  <a:pt x="4384226" y="692976"/>
+                </a:lnTo>
+                <a:lnTo>
+                  <a:pt x="4423371" y="670622"/>
+                </a:lnTo>
+                <a:lnTo>
+                  <a:pt x="4462516" y="648268"/>
+                </a:lnTo>
+                <a:lnTo>
+                  <a:pt x="4501661" y="625914"/>
+                </a:lnTo>
+                <a:lnTo>
+                  <a:pt x="4540806" y="603560"/>
+                </a:lnTo>
+                <a:lnTo>
+                  <a:pt x="4579951" y="581206"/>
+                </a:lnTo>
+                <a:lnTo>
+                  <a:pt x="4619096" y="558852"/>
+                </a:lnTo>
+                <a:lnTo>
+                  <a:pt x="4658241" y="536498"/>
+                </a:lnTo>
+                <a:lnTo>
+                  <a:pt x="4697385" y="514144"/>
+                </a:lnTo>
+                <a:lnTo>
+                  <a:pt x="4736530" y="491789"/>
+                </a:lnTo>
+                <a:lnTo>
+                  <a:pt x="4775675" y="469435"/>
+                </a:lnTo>
+                <a:lnTo>
+                  <a:pt x="4814820" y="447081"/>
+                </a:lnTo>
+                <a:lnTo>
+                  <a:pt x="4853965" y="424727"/>
+                </a:lnTo>
+                <a:lnTo>
+                  <a:pt x="4893110" y="402373"/>
+                </a:lnTo>
+                <a:lnTo>
+                  <a:pt x="4932255" y="380019"/>
+                </a:lnTo>
+                <a:lnTo>
+                  <a:pt x="4971400" y="357665"/>
+                </a:lnTo>
+                <a:lnTo>
+                  <a:pt x="5010545" y="335311"/>
+                </a:lnTo>
+                <a:lnTo>
+                  <a:pt x="5049689" y="312957"/>
+                </a:lnTo>
+                <a:lnTo>
+                  <a:pt x="5088834" y="290603"/>
+                </a:lnTo>
+                <a:lnTo>
+                  <a:pt x="5127979" y="268249"/>
+                </a:lnTo>
+                <a:lnTo>
+                  <a:pt x="5167124" y="245895"/>
+                </a:lnTo>
+                <a:lnTo>
+                  <a:pt x="5206269" y="223541"/>
+                </a:lnTo>
+                <a:lnTo>
+                  <a:pt x="5245414" y="201187"/>
+                </a:lnTo>
+                <a:lnTo>
+                  <a:pt x="5284559" y="178833"/>
+                </a:lnTo>
+                <a:lnTo>
+                  <a:pt x="5323704" y="156479"/>
+                </a:lnTo>
+                <a:lnTo>
+                  <a:pt x="5362848" y="134124"/>
+                </a:lnTo>
+                <a:lnTo>
+                  <a:pt x="5401993" y="111770"/>
+                </a:lnTo>
+                <a:lnTo>
+                  <a:pt x="5441138" y="89416"/>
+                </a:lnTo>
+                <a:lnTo>
+                  <a:pt x="5480283" y="67062"/>
+                </a:lnTo>
+                <a:lnTo>
+                  <a:pt x="5519428" y="44708"/>
+                </a:lnTo>
+                <a:lnTo>
+                  <a:pt x="5558573" y="22354"/>
+                </a:lnTo>
+                <a:lnTo>
+                  <a:pt x="5597718" y="0"/>
+                </a:lnTo>
+              </a:path>
+            </a:pathLst>
+          </a:custGeom>
+          <a:noFill/>
+          <a:ln w="38100">
             <a:solidFill>
               <a:srgbClr val="8EDBD4"/>
             </a:solidFill>
           </a:ln>
           <a:effectLst/>
         </p:spPr>
-      </p:cxnSp>
-      <p:cxnSp>
-        <p:nvCxnSpPr>
-          <p:cNvPr id="28" name="C3-E22 line 26" descr="sci-ppt:o026"/>
-          <p:cNvCxnSpPr/>
-          <p:nvPr/>
-        </p:nvCxnSpPr>
-        <p:spPr>
-          <a:xfrm flipV="1">
-            <a:off x="6835140" y="1562375"/>
-            <a:ext cx="59436" cy="30738"/>
-          </a:xfrm>
-          <a:prstGeom prst="line">
-            <a:avLst/>
-          </a:prstGeom>
-          <a:ln w="25400">
-            <a:solidFill>
-              <a:srgbClr val="8EDBD4"/>
-            </a:solidFill>
-          </a:ln>
-          <a:effectLst/>
-        </p:spPr>
-      </p:cxnSp>
-      <p:cxnSp>
-        <p:nvCxnSpPr>
-          <p:cNvPr id="29" name="C3-E22 line 27" descr="sci-ppt:o027"/>
-          <p:cNvCxnSpPr/>
-          <p:nvPr/>
-        </p:nvCxnSpPr>
-        <p:spPr>
-          <a:xfrm flipV="1">
-            <a:off x="6894576" y="1526249"/>
-            <a:ext cx="59436" cy="36126"/>
-          </a:xfrm>
-          <a:prstGeom prst="line">
-            <a:avLst/>
-          </a:prstGeom>
-          <a:ln w="25400">
-            <a:solidFill>
-              <a:srgbClr val="8EDBD4"/>
-            </a:solidFill>
-          </a:ln>
-          <a:effectLst/>
-        </p:spPr>
-      </p:cxnSp>
-      <p:cxnSp>
-        <p:nvCxnSpPr>
-          <p:cNvPr id="30" name="C3-E22 line 28" descr="sci-ppt:o028"/>
-          <p:cNvCxnSpPr/>
-          <p:nvPr/>
-        </p:nvCxnSpPr>
-        <p:spPr>
-          <a:xfrm flipV="1">
-            <a:off x="6954012" y="1487242"/>
-            <a:ext cx="59436" cy="39007"/>
-          </a:xfrm>
-          <a:prstGeom prst="line">
-            <a:avLst/>
-          </a:prstGeom>
-          <a:ln w="25400">
-            <a:solidFill>
-              <a:srgbClr val="8EDBD4"/>
-            </a:solidFill>
-          </a:ln>
-          <a:effectLst/>
-        </p:spPr>
-      </p:cxnSp>
-      <p:cxnSp>
-        <p:nvCxnSpPr>
-          <p:cNvPr id="31" name="C3-E22 line 29" descr="sci-ppt:o029"/>
-          <p:cNvCxnSpPr/>
-          <p:nvPr/>
-        </p:nvCxnSpPr>
-        <p:spPr>
-          <a:xfrm flipV="1">
-            <a:off x="7013448" y="1448186"/>
-            <a:ext cx="59436" cy="39056"/>
-          </a:xfrm>
-          <a:prstGeom prst="line">
-            <a:avLst/>
-          </a:prstGeom>
-          <a:ln w="25400">
-            <a:solidFill>
-              <a:srgbClr val="8EDBD4"/>
-            </a:solidFill>
-          </a:ln>
-          <a:effectLst/>
-        </p:spPr>
-      </p:cxnSp>
+        <p:txBody>
+          <a:bodyPr rtlCol="0" anchor="ctr"/>
+          <a:lstStyle/>
+          <a:p>
+            <a:pPr algn="ctr"/>
+          </a:p>
+        </p:txBody>
+      </p:sp>
       <p:cxnSp>
         <p:nvCxnSpPr>
           <p:cNvPr id="32" name="C3-E22 line 30" descr="sci-ppt:o030"/>
@@ -3877,65 +4409,94 @@
           <p:nvPr/>
         </p:nvCxnSpPr>
         <p:spPr>
-          <a:xfrm flipV="1">
-            <a:off x="7072884" y="1412032"/>
-            <a:ext cx="59436" cy="36154"/>
+          <a:xfrm>
+            <a:off x="1831140" y="1371600"/>
+            <a:ext cx="0" cy="3657600"/>
           </a:xfrm>
           <a:prstGeom prst="line">
             <a:avLst/>
           </a:prstGeom>
-          <a:ln w="25400">
+          <a:ln w="16510">
             <a:solidFill>
-              <a:srgbClr val="8EDBD4"/>
+              <a:srgbClr val="F2B880"/>
+            </a:solidFill>
+            <a:prstDash val="dash"/>
+          </a:ln>
+          <a:effectLst/>
+        </p:spPr>
+      </p:cxnSp>
+      <p:sp>
+        <p:nvSpPr>
+          <p:cNvPr id="33" name="C3-E22 ellipse 31" descr="sci-ppt:o031"/>
+          <p:cNvSpPr/>
+          <p:nvPr/>
+        </p:nvSpPr>
+        <p:spPr>
+          <a:xfrm>
+            <a:off x="1757988" y="3988047"/>
+            <a:ext cx="146304" cy="146304"/>
+          </a:xfrm>
+          <a:prstGeom prst="ellipse">
+            <a:avLst/>
+          </a:prstGeom>
+          <a:solidFill>
+            <a:srgbClr val="F2B880"/>
+          </a:solidFill>
+          <a:ln w="12700">
+            <a:solidFill>
+              <a:srgbClr val="F2B880"/>
             </a:solidFill>
           </a:ln>
           <a:effectLst/>
         </p:spPr>
-      </p:cxnSp>
-      <p:cxnSp>
-        <p:nvCxnSpPr>
-          <p:cNvPr id="33" name="C3-E22 line 31" descr="sci-ppt:o031"/>
-          <p:cNvCxnSpPr/>
+        <p:txBody>
+          <a:bodyPr rtlCol="0" anchor="ctr"/>
+          <a:lstStyle/>
+          <a:p>
+            <a:pPr algn="ctr"/>
+          </a:p>
+        </p:txBody>
+      </p:sp>
+      <p:sp>
+        <p:nvSpPr>
+          <p:cNvPr id="34" name="C3-E22 text 32" descr="sci-ppt:o032"/>
+          <p:cNvSpPr txBox="1"/>
           <p:nvPr/>
-        </p:nvCxnSpPr>
-        <p:spPr>
-          <a:xfrm flipV="1">
-            <a:off x="7132320" y="1381631"/>
-            <a:ext cx="59436" cy="30401"/>
-          </a:xfrm>
-          <a:prstGeom prst="line">
+        </p:nvSpPr>
+        <p:spPr>
+          <a:xfrm>
+            <a:off x="1968300" y="3513213"/>
+            <a:ext cx="2743200" cy="231648"/>
+          </a:xfrm>
+          <a:prstGeom prst="rect">
             <a:avLst/>
           </a:prstGeom>
-          <a:ln w="25400">
-            <a:solidFill>
-              <a:srgbClr val="8EDBD4"/>
-            </a:solidFill>
-          </a:ln>
+          <a:noFill/>
           <a:effectLst/>
         </p:spPr>
-      </p:cxnSp>
-      <p:cxnSp>
-        <p:nvCxnSpPr>
-          <p:cNvPr id="34" name="C3-E22 line 32" descr="sci-ppt:o032"/>
-          <p:cNvCxnSpPr/>
-          <p:nvPr/>
-        </p:nvCxnSpPr>
-        <p:spPr>
-          <a:xfrm flipV="1">
-            <a:off x="7191756" y="1359506"/>
-            <a:ext cx="59436" cy="22125"/>
-          </a:xfrm>
-          <a:prstGeom prst="line">
-            <a:avLst/>
-          </a:prstGeom>
-          <a:ln w="25400">
-            <a:solidFill>
-              <a:srgbClr val="8EDBD4"/>
-            </a:solidFill>
-          </a:ln>
-          <a:effectLst/>
-        </p:spPr>
-      </p:cxnSp>
+        <p:txBody>
+          <a:bodyPr wrap="none" lIns="18288" rIns="18288" tIns="18288" bIns="18288" anchor="t">
+            <a:spAutoFit/>
+          </a:bodyPr>
+          <a:lstStyle/>
+          <a:p>
+            <a:pPr algn="l">
+              <a:spcAft>
+                <a:spcPts val="0"/>
+              </a:spcAft>
+            </a:pPr>
+            <a:r>
+              <a:rPr sz="1200" b="0" i="0">
+                <a:solidFill>
+                  <a:srgbClr val="F2B880"/>
+                </a:solidFill>
+                <a:latin typeface="Arial"/>
+              </a:rPr>
+              <a:t>flight 3.13 µs: 1 % → 2.26 %</a:t>
+            </a:r>
+          </a:p>
+        </p:txBody>
+      </p:sp>
       <p:cxnSp>
         <p:nvCxnSpPr>
           <p:cNvPr id="35" name="C3-E22 line 33" descr="sci-ppt:o033"/>
@@ -3943,1043 +4504,104 @@
           <p:nvPr/>
         </p:nvCxnSpPr>
         <p:spPr>
-          <a:xfrm flipV="1">
-            <a:off x="7251192" y="1347648"/>
-            <a:ext cx="59436" cy="11858"/>
+          <a:xfrm>
+            <a:off x="6085673" y="1371600"/>
+            <a:ext cx="0" cy="3657600"/>
           </a:xfrm>
           <a:prstGeom prst="line">
             <a:avLst/>
           </a:prstGeom>
-          <a:ln w="25400">
+          <a:ln w="16510">
+            <a:solidFill>
+              <a:srgbClr val="F28BA0"/>
+            </a:solidFill>
+            <a:prstDash val="dash"/>
+          </a:ln>
+          <a:effectLst/>
+        </p:spPr>
+      </p:cxnSp>
+      <p:sp>
+        <p:nvSpPr>
+          <p:cNvPr id="36" name="C3-E22 text 34" descr="sci-ppt:o034"/>
+          <p:cNvSpPr txBox="1"/>
+          <p:nvPr/>
+        </p:nvSpPr>
+        <p:spPr>
+          <a:xfrm>
+            <a:off x="4348313" y="1984654"/>
+            <a:ext cx="1645920" cy="231648"/>
+          </a:xfrm>
+          <a:prstGeom prst="rect">
+            <a:avLst/>
+          </a:prstGeom>
+          <a:noFill/>
+          <a:effectLst/>
+        </p:spPr>
+        <p:txBody>
+          <a:bodyPr wrap="none" lIns="18288" rIns="18288" tIns="18288" bIns="18288" anchor="t">
+            <a:spAutoFit/>
+          </a:bodyPr>
+          <a:lstStyle/>
+          <a:p>
+            <a:pPr algn="l">
+              <a:spcAft>
+                <a:spcPts val="0"/>
+              </a:spcAft>
+            </a:pPr>
+            <a:r>
+              <a:rPr sz="1200" b="0" i="0">
+                <a:solidFill>
+                  <a:srgbClr val="F28BA0"/>
+                </a:solidFill>
+                <a:latin typeface="Arial"/>
+              </a:rPr>
+              <a:t>δ = a₀ at 17.7 µs</a:t>
+            </a:r>
+          </a:p>
+        </p:txBody>
+      </p:sp>
+      <p:sp>
+        <p:nvSpPr>
+          <p:cNvPr id="37" name="C3-E22 round_rect 35" descr="sci-ppt:o035"/>
+          <p:cNvSpPr/>
+          <p:nvPr/>
+        </p:nvSpPr>
+        <p:spPr>
+          <a:xfrm>
+            <a:off x="7040880" y="1371600"/>
+            <a:ext cx="4800600" cy="3657600"/>
+          </a:xfrm>
+          <a:prstGeom prst="roundRect">
+            <a:avLst/>
+          </a:prstGeom>
+          <a:solidFill>
+            <a:srgbClr val="213E4B"/>
+          </a:solidFill>
+          <a:ln w="20320">
             <a:solidFill>
               <a:srgbClr val="8EDBD4"/>
             </a:solidFill>
           </a:ln>
           <a:effectLst/>
         </p:spPr>
-      </p:cxnSp>
-      <p:cxnSp>
-        <p:nvCxnSpPr>
-          <p:cNvPr id="36" name="C3-E22 line 34" descr="sci-ppt:o034"/>
-          <p:cNvCxnSpPr/>
-          <p:nvPr/>
-        </p:nvCxnSpPr>
-        <p:spPr>
-          <a:xfrm flipV="1">
-            <a:off x="7310628" y="1347345"/>
-            <a:ext cx="59436" cy="303"/>
-          </a:xfrm>
-          <a:prstGeom prst="line">
-            <a:avLst/>
-          </a:prstGeom>
-          <a:ln w="25400">
-            <a:solidFill>
-              <a:srgbClr val="8EDBD4"/>
-            </a:solidFill>
-          </a:ln>
-          <a:effectLst/>
-        </p:spPr>
-      </p:cxnSp>
-      <p:cxnSp>
-        <p:nvCxnSpPr>
-          <p:cNvPr id="37" name="C3-E22 line 35" descr="sci-ppt:o035"/>
-          <p:cNvCxnSpPr/>
-          <p:nvPr/>
-        </p:nvCxnSpPr>
-        <p:spPr>
-          <a:xfrm>
-            <a:off x="7370064" y="1347345"/>
-            <a:ext cx="59436" cy="11711"/>
-          </a:xfrm>
-          <a:prstGeom prst="line">
-            <a:avLst/>
-          </a:prstGeom>
-          <a:ln w="25400">
-            <a:solidFill>
-              <a:srgbClr val="8EDBD4"/>
-            </a:solidFill>
-          </a:ln>
-          <a:effectLst/>
-        </p:spPr>
-      </p:cxnSp>
-      <p:cxnSp>
-        <p:nvCxnSpPr>
-          <p:cNvPr id="38" name="C3-E22 line 36" descr="sci-ppt:o036"/>
-          <p:cNvCxnSpPr/>
-          <p:nvPr/>
-        </p:nvCxnSpPr>
-        <p:spPr>
-          <a:xfrm>
-            <a:off x="7429500" y="1359056"/>
-            <a:ext cx="59436" cy="23290"/>
-          </a:xfrm>
-          <a:prstGeom prst="line">
-            <a:avLst/>
-          </a:prstGeom>
-          <a:ln w="25400">
-            <a:solidFill>
-              <a:srgbClr val="8EDBD4"/>
-            </a:solidFill>
-          </a:ln>
-          <a:effectLst/>
-        </p:spPr>
-      </p:cxnSp>
-      <p:cxnSp>
-        <p:nvCxnSpPr>
-          <p:cNvPr id="39" name="C3-E22 line 37" descr="sci-ppt:o037"/>
-          <p:cNvCxnSpPr/>
-          <p:nvPr/>
-        </p:nvCxnSpPr>
-        <p:spPr>
-          <a:xfrm>
-            <a:off x="7488936" y="1382346"/>
-            <a:ext cx="59436" cy="33542"/>
-          </a:xfrm>
-          <a:prstGeom prst="line">
-            <a:avLst/>
-          </a:prstGeom>
-          <a:ln w="25400">
-            <a:solidFill>
-              <a:srgbClr val="8EDBD4"/>
-            </a:solidFill>
-          </a:ln>
-          <a:effectLst/>
-        </p:spPr>
-      </p:cxnSp>
-      <p:cxnSp>
-        <p:nvCxnSpPr>
-          <p:cNvPr id="40" name="C3-E22 line 38" descr="sci-ppt:o038"/>
-          <p:cNvCxnSpPr/>
-          <p:nvPr/>
-        </p:nvCxnSpPr>
-        <p:spPr>
-          <a:xfrm>
-            <a:off x="7548372" y="1415888"/>
-            <a:ext cx="59436" cy="41646"/>
-          </a:xfrm>
-          <a:prstGeom prst="line">
-            <a:avLst/>
-          </a:prstGeom>
-          <a:ln w="25400">
-            <a:solidFill>
-              <a:srgbClr val="8EDBD4"/>
-            </a:solidFill>
-          </a:ln>
-          <a:effectLst/>
-        </p:spPr>
-      </p:cxnSp>
-      <p:cxnSp>
-        <p:nvCxnSpPr>
-          <p:cNvPr id="41" name="C3-E22 line 39" descr="sci-ppt:o039"/>
-          <p:cNvCxnSpPr/>
-          <p:nvPr/>
-        </p:nvCxnSpPr>
-        <p:spPr>
-          <a:xfrm>
-            <a:off x="7607808" y="1457534"/>
-            <a:ext cx="59436" cy="46913"/>
-          </a:xfrm>
-          <a:prstGeom prst="line">
-            <a:avLst/>
-          </a:prstGeom>
-          <a:ln w="25400">
-            <a:solidFill>
-              <a:srgbClr val="8EDBD4"/>
-            </a:solidFill>
-          </a:ln>
-          <a:effectLst/>
-        </p:spPr>
-      </p:cxnSp>
-      <p:cxnSp>
-        <p:nvCxnSpPr>
-          <p:cNvPr id="42" name="C3-E22 line 40" descr="sci-ppt:o040"/>
-          <p:cNvCxnSpPr/>
-          <p:nvPr/>
-        </p:nvCxnSpPr>
-        <p:spPr>
-          <a:xfrm>
-            <a:off x="7667244" y="1504447"/>
-            <a:ext cx="59435" cy="48852"/>
-          </a:xfrm>
-          <a:prstGeom prst="line">
-            <a:avLst/>
-          </a:prstGeom>
-          <a:ln w="25400">
-            <a:solidFill>
-              <a:srgbClr val="8EDBD4"/>
-            </a:solidFill>
-          </a:ln>
-          <a:effectLst/>
-        </p:spPr>
-      </p:cxnSp>
-      <p:cxnSp>
-        <p:nvCxnSpPr>
-          <p:cNvPr id="43" name="C3-E22 line 41" descr="sci-ppt:o041"/>
-          <p:cNvCxnSpPr/>
-          <p:nvPr/>
-        </p:nvCxnSpPr>
-        <p:spPr>
-          <a:xfrm>
-            <a:off x="7726679" y="1553299"/>
-            <a:ext cx="59437" cy="47201"/>
-          </a:xfrm>
-          <a:prstGeom prst="line">
-            <a:avLst/>
-          </a:prstGeom>
-          <a:ln w="25400">
-            <a:solidFill>
-              <a:srgbClr val="8EDBD4"/>
-            </a:solidFill>
-          </a:ln>
-          <a:effectLst/>
-        </p:spPr>
-      </p:cxnSp>
-      <p:cxnSp>
-        <p:nvCxnSpPr>
-          <p:cNvPr id="44" name="C3-E22 line 42" descr="sci-ppt:o042"/>
-          <p:cNvCxnSpPr/>
-          <p:nvPr/>
-        </p:nvCxnSpPr>
-        <p:spPr>
-          <a:xfrm>
-            <a:off x="7786116" y="1600500"/>
-            <a:ext cx="59436" cy="41969"/>
-          </a:xfrm>
-          <a:prstGeom prst="line">
-            <a:avLst/>
-          </a:prstGeom>
-          <a:ln w="25400">
-            <a:solidFill>
-              <a:srgbClr val="8EDBD4"/>
-            </a:solidFill>
-          </a:ln>
-          <a:effectLst/>
-        </p:spPr>
-      </p:cxnSp>
-      <p:cxnSp>
-        <p:nvCxnSpPr>
-          <p:cNvPr id="45" name="C3-E22 line 43" descr="sci-ppt:o043"/>
-          <p:cNvCxnSpPr/>
-          <p:nvPr/>
-        </p:nvCxnSpPr>
-        <p:spPr>
-          <a:xfrm>
-            <a:off x="7845552" y="1642469"/>
-            <a:ext cx="59436" cy="33429"/>
-          </a:xfrm>
-          <a:prstGeom prst="line">
-            <a:avLst/>
-          </a:prstGeom>
-          <a:ln w="25400">
-            <a:solidFill>
-              <a:srgbClr val="8EDBD4"/>
-            </a:solidFill>
-          </a:ln>
-          <a:effectLst/>
-        </p:spPr>
-      </p:cxnSp>
-      <p:cxnSp>
-        <p:nvCxnSpPr>
-          <p:cNvPr id="46" name="C3-E22 line 44" descr="sci-ppt:o044"/>
-          <p:cNvCxnSpPr/>
-          <p:nvPr/>
-        </p:nvCxnSpPr>
-        <p:spPr>
-          <a:xfrm>
-            <a:off x="7904988" y="1675898"/>
-            <a:ext cx="59436" cy="22119"/>
-          </a:xfrm>
-          <a:prstGeom prst="line">
-            <a:avLst/>
-          </a:prstGeom>
-          <a:ln w="25400">
-            <a:solidFill>
-              <a:srgbClr val="8EDBD4"/>
-            </a:solidFill>
-          </a:ln>
-          <a:effectLst/>
-        </p:spPr>
-      </p:cxnSp>
-      <p:cxnSp>
-        <p:nvCxnSpPr>
-          <p:cNvPr id="47" name="C3-E22 line 45" descr="sci-ppt:o045"/>
-          <p:cNvCxnSpPr/>
-          <p:nvPr/>
-        </p:nvCxnSpPr>
-        <p:spPr>
-          <a:xfrm>
-            <a:off x="7964424" y="1698017"/>
-            <a:ext cx="59436" cy="8799"/>
-          </a:xfrm>
-          <a:prstGeom prst="line">
-            <a:avLst/>
-          </a:prstGeom>
-          <a:ln w="25400">
-            <a:solidFill>
-              <a:srgbClr val="8EDBD4"/>
-            </a:solidFill>
-          </a:ln>
-          <a:effectLst/>
-        </p:spPr>
-      </p:cxnSp>
-      <p:cxnSp>
-        <p:nvCxnSpPr>
-          <p:cNvPr id="48" name="C3-E22 line 46" descr="sci-ppt:o046"/>
-          <p:cNvCxnSpPr/>
-          <p:nvPr/>
-        </p:nvCxnSpPr>
-        <p:spPr>
-          <a:xfrm flipV="1">
-            <a:off x="8023860" y="1701224"/>
-            <a:ext cx="59436" cy="5592"/>
-          </a:xfrm>
-          <a:prstGeom prst="line">
-            <a:avLst/>
-          </a:prstGeom>
-          <a:ln w="25400">
-            <a:solidFill>
-              <a:srgbClr val="8EDBD4"/>
-            </a:solidFill>
-          </a:ln>
-          <a:effectLst/>
-        </p:spPr>
-      </p:cxnSp>
-      <p:cxnSp>
-        <p:nvCxnSpPr>
-          <p:cNvPr id="49" name="C3-E22 line 47" descr="sci-ppt:o047"/>
-          <p:cNvCxnSpPr/>
-          <p:nvPr/>
-        </p:nvCxnSpPr>
-        <p:spPr>
-          <a:xfrm flipV="1">
-            <a:off x="8083296" y="1681214"/>
-            <a:ext cx="59436" cy="20010"/>
-          </a:xfrm>
-          <a:prstGeom prst="line">
-            <a:avLst/>
-          </a:prstGeom>
-          <a:ln w="25400">
-            <a:solidFill>
-              <a:srgbClr val="8EDBD4"/>
-            </a:solidFill>
-          </a:ln>
-          <a:effectLst/>
-        </p:spPr>
-      </p:cxnSp>
-      <p:cxnSp>
-        <p:nvCxnSpPr>
-          <p:cNvPr id="50" name="C3-E22 line 48" descr="sci-ppt:o048"/>
-          <p:cNvCxnSpPr/>
-          <p:nvPr/>
-        </p:nvCxnSpPr>
-        <p:spPr>
-          <a:xfrm flipV="1">
-            <a:off x="8142732" y="1647836"/>
-            <a:ext cx="59436" cy="33378"/>
-          </a:xfrm>
-          <a:prstGeom prst="line">
-            <a:avLst/>
-          </a:prstGeom>
-          <a:ln w="25400">
-            <a:solidFill>
-              <a:srgbClr val="8EDBD4"/>
-            </a:solidFill>
-          </a:ln>
-          <a:effectLst/>
-        </p:spPr>
-      </p:cxnSp>
-      <p:cxnSp>
-        <p:nvCxnSpPr>
-          <p:cNvPr id="51" name="C3-E22 line 49" descr="sci-ppt:o049"/>
-          <p:cNvCxnSpPr/>
-          <p:nvPr/>
-        </p:nvCxnSpPr>
-        <p:spPr>
-          <a:xfrm flipV="1">
-            <a:off x="8202168" y="1603176"/>
-            <a:ext cx="59436" cy="44660"/>
-          </a:xfrm>
-          <a:prstGeom prst="line">
-            <a:avLst/>
-          </a:prstGeom>
-          <a:ln w="25400">
-            <a:solidFill>
-              <a:srgbClr val="8EDBD4"/>
-            </a:solidFill>
-          </a:ln>
-          <a:effectLst/>
-        </p:spPr>
-      </p:cxnSp>
-      <p:cxnSp>
-        <p:nvCxnSpPr>
-          <p:cNvPr id="52" name="C3-E22 line 50" descr="sci-ppt:o050"/>
-          <p:cNvCxnSpPr/>
-          <p:nvPr/>
-        </p:nvCxnSpPr>
-        <p:spPr>
-          <a:xfrm flipV="1">
-            <a:off x="8261604" y="1550222"/>
-            <a:ext cx="59436" cy="52954"/>
-          </a:xfrm>
-          <a:prstGeom prst="line">
-            <a:avLst/>
-          </a:prstGeom>
-          <a:ln w="25400">
-            <a:solidFill>
-              <a:srgbClr val="8EDBD4"/>
-            </a:solidFill>
-          </a:ln>
-          <a:effectLst/>
-        </p:spPr>
-      </p:cxnSp>
-      <p:cxnSp>
-        <p:nvCxnSpPr>
-          <p:cNvPr id="53" name="C3-E22 line 51" descr="sci-ppt:o051"/>
-          <p:cNvCxnSpPr/>
-          <p:nvPr/>
-        </p:nvCxnSpPr>
-        <p:spPr>
-          <a:xfrm flipV="1">
-            <a:off x="8321040" y="1492668"/>
-            <a:ext cx="59435" cy="57554"/>
-          </a:xfrm>
-          <a:prstGeom prst="line">
-            <a:avLst/>
-          </a:prstGeom>
-          <a:ln w="25400">
-            <a:solidFill>
-              <a:srgbClr val="8EDBD4"/>
-            </a:solidFill>
-          </a:ln>
-          <a:effectLst/>
-        </p:spPr>
-      </p:cxnSp>
-      <p:cxnSp>
-        <p:nvCxnSpPr>
-          <p:cNvPr id="54" name="C3-E22 line 52" descr="sci-ppt:o052"/>
-          <p:cNvCxnSpPr/>
-          <p:nvPr/>
-        </p:nvCxnSpPr>
-        <p:spPr>
-          <a:xfrm flipV="1">
-            <a:off x="8380475" y="1434659"/>
-            <a:ext cx="59437" cy="58009"/>
-          </a:xfrm>
-          <a:prstGeom prst="line">
-            <a:avLst/>
-          </a:prstGeom>
-          <a:ln w="25400">
-            <a:solidFill>
-              <a:srgbClr val="8EDBD4"/>
-            </a:solidFill>
-          </a:ln>
-          <a:effectLst/>
-        </p:spPr>
-      </p:cxnSp>
-      <p:cxnSp>
-        <p:nvCxnSpPr>
-          <p:cNvPr id="55" name="C3-E22 line 53" descr="sci-ppt:o053"/>
-          <p:cNvCxnSpPr/>
-          <p:nvPr/>
-        </p:nvCxnSpPr>
-        <p:spPr>
-          <a:xfrm flipV="1">
-            <a:off x="8439912" y="1380488"/>
-            <a:ext cx="59436" cy="54171"/>
-          </a:xfrm>
-          <a:prstGeom prst="line">
-            <a:avLst/>
-          </a:prstGeom>
-          <a:ln w="25400">
-            <a:solidFill>
-              <a:srgbClr val="8EDBD4"/>
-            </a:solidFill>
-          </a:ln>
-          <a:effectLst/>
-        </p:spPr>
-      </p:cxnSp>
-      <p:cxnSp>
-        <p:nvCxnSpPr>
-          <p:cNvPr id="56" name="C3-E22 line 54" descr="sci-ppt:o054"/>
-          <p:cNvCxnSpPr/>
-          <p:nvPr/>
-        </p:nvCxnSpPr>
-        <p:spPr>
-          <a:xfrm flipV="1">
-            <a:off x="8499348" y="1334283"/>
-            <a:ext cx="59436" cy="46205"/>
-          </a:xfrm>
-          <a:prstGeom prst="line">
-            <a:avLst/>
-          </a:prstGeom>
-          <a:ln w="25400">
-            <a:solidFill>
-              <a:srgbClr val="8EDBD4"/>
-            </a:solidFill>
-          </a:ln>
-          <a:effectLst/>
-        </p:spPr>
-      </p:cxnSp>
-      <p:cxnSp>
-        <p:nvCxnSpPr>
-          <p:cNvPr id="57" name="C3-E22 line 55" descr="sci-ppt:o055"/>
-          <p:cNvCxnSpPr/>
-          <p:nvPr/>
-        </p:nvCxnSpPr>
-        <p:spPr>
-          <a:xfrm flipV="1">
-            <a:off x="8558784" y="1299690"/>
-            <a:ext cx="59436" cy="34593"/>
-          </a:xfrm>
-          <a:prstGeom prst="line">
-            <a:avLst/>
-          </a:prstGeom>
-          <a:ln w="25400">
-            <a:solidFill>
-              <a:srgbClr val="8EDBD4"/>
-            </a:solidFill>
-          </a:ln>
-          <a:effectLst/>
-        </p:spPr>
-      </p:cxnSp>
-      <p:cxnSp>
-        <p:nvCxnSpPr>
-          <p:cNvPr id="58" name="C3-E22 line 56" descr="sci-ppt:o056"/>
-          <p:cNvCxnSpPr/>
-          <p:nvPr/>
-        </p:nvCxnSpPr>
-        <p:spPr>
-          <a:xfrm flipV="1">
-            <a:off x="8618220" y="1279589"/>
-            <a:ext cx="59436" cy="20101"/>
-          </a:xfrm>
-          <a:prstGeom prst="line">
-            <a:avLst/>
-          </a:prstGeom>
-          <a:ln w="25400">
-            <a:solidFill>
-              <a:srgbClr val="8EDBD4"/>
-            </a:solidFill>
-          </a:ln>
-          <a:effectLst/>
-        </p:spPr>
-      </p:cxnSp>
-      <p:cxnSp>
-        <p:nvCxnSpPr>
-          <p:cNvPr id="59" name="C3-E22 line 57" descr="sci-ppt:o057"/>
-          <p:cNvCxnSpPr/>
-          <p:nvPr/>
-        </p:nvCxnSpPr>
-        <p:spPr>
-          <a:xfrm flipV="1">
-            <a:off x="8677656" y="1275855"/>
-            <a:ext cx="59436" cy="3734"/>
-          </a:xfrm>
-          <a:prstGeom prst="line">
-            <a:avLst/>
-          </a:prstGeom>
-          <a:ln w="25400">
-            <a:solidFill>
-              <a:srgbClr val="8EDBD4"/>
-            </a:solidFill>
-          </a:ln>
-          <a:effectLst/>
-        </p:spPr>
-      </p:cxnSp>
-      <p:cxnSp>
-        <p:nvCxnSpPr>
-          <p:cNvPr id="60" name="C3-E22 line 58" descr="sci-ppt:o058"/>
-          <p:cNvCxnSpPr/>
-          <p:nvPr/>
-        </p:nvCxnSpPr>
-        <p:spPr>
-          <a:xfrm>
-            <a:off x="8737092" y="1275855"/>
-            <a:ext cx="59436" cy="13342"/>
-          </a:xfrm>
-          <a:prstGeom prst="line">
-            <a:avLst/>
-          </a:prstGeom>
-          <a:ln w="25400">
-            <a:solidFill>
-              <a:srgbClr val="8EDBD4"/>
-            </a:solidFill>
-          </a:ln>
-          <a:effectLst/>
-        </p:spPr>
-      </p:cxnSp>
-      <p:cxnSp>
-        <p:nvCxnSpPr>
-          <p:cNvPr id="61" name="C3-E22 line 59" descr="sci-ppt:o059"/>
-          <p:cNvCxnSpPr/>
-          <p:nvPr/>
-        </p:nvCxnSpPr>
-        <p:spPr>
-          <a:xfrm>
-            <a:off x="8796528" y="1289197"/>
-            <a:ext cx="59436" cy="29876"/>
-          </a:xfrm>
-          <a:prstGeom prst="line">
-            <a:avLst/>
-          </a:prstGeom>
-          <a:ln w="25400">
-            <a:solidFill>
-              <a:srgbClr val="8EDBD4"/>
-            </a:solidFill>
-          </a:ln>
-          <a:effectLst/>
-        </p:spPr>
-      </p:cxnSp>
-      <p:cxnSp>
-        <p:nvCxnSpPr>
-          <p:cNvPr id="62" name="C3-E22 line 60" descr="sci-ppt:o060"/>
-          <p:cNvCxnSpPr/>
-          <p:nvPr/>
-        </p:nvCxnSpPr>
-        <p:spPr>
-          <a:xfrm>
-            <a:off x="8855964" y="1319073"/>
-            <a:ext cx="59436" cy="44621"/>
-          </a:xfrm>
-          <a:prstGeom prst="line">
-            <a:avLst/>
-          </a:prstGeom>
-          <a:ln w="25400">
-            <a:solidFill>
-              <a:srgbClr val="8EDBD4"/>
-            </a:solidFill>
-          </a:ln>
-          <a:effectLst/>
-        </p:spPr>
-      </p:cxnSp>
-      <p:cxnSp>
-        <p:nvCxnSpPr>
-          <p:cNvPr id="63" name="C3-E22 line 61" descr="sci-ppt:o061"/>
-          <p:cNvCxnSpPr/>
-          <p:nvPr/>
-        </p:nvCxnSpPr>
-        <p:spPr>
-          <a:xfrm>
-            <a:off x="8915400" y="1363694"/>
-            <a:ext cx="59436" cy="56439"/>
-          </a:xfrm>
-          <a:prstGeom prst="line">
-            <a:avLst/>
-          </a:prstGeom>
-          <a:ln w="25400">
-            <a:solidFill>
-              <a:srgbClr val="8EDBD4"/>
-            </a:solidFill>
-          </a:ln>
-          <a:effectLst/>
-        </p:spPr>
-      </p:cxnSp>
-      <p:cxnSp>
-        <p:nvCxnSpPr>
-          <p:cNvPr id="64" name="C3-E22 line 62" descr="sci-ppt:o062"/>
-          <p:cNvCxnSpPr/>
-          <p:nvPr/>
-        </p:nvCxnSpPr>
-        <p:spPr>
-          <a:xfrm>
-            <a:off x="8974836" y="1420133"/>
-            <a:ext cx="59436" cy="64379"/>
-          </a:xfrm>
-          <a:prstGeom prst="line">
-            <a:avLst/>
-          </a:prstGeom>
-          <a:ln w="25400">
-            <a:solidFill>
-              <a:srgbClr val="8EDBD4"/>
-            </a:solidFill>
-          </a:ln>
-          <a:effectLst/>
-        </p:spPr>
-      </p:cxnSp>
-      <p:cxnSp>
-        <p:nvCxnSpPr>
-          <p:cNvPr id="65" name="C3-E22 line 63" descr="sci-ppt:o063"/>
-          <p:cNvCxnSpPr/>
-          <p:nvPr/>
-        </p:nvCxnSpPr>
-        <p:spPr>
-          <a:xfrm>
-            <a:off x="9034272" y="1484512"/>
-            <a:ext cx="59436" cy="67754"/>
-          </a:xfrm>
-          <a:prstGeom prst="line">
-            <a:avLst/>
-          </a:prstGeom>
-          <a:ln w="25400">
-            <a:solidFill>
-              <a:srgbClr val="8EDBD4"/>
-            </a:solidFill>
-          </a:ln>
-          <a:effectLst/>
-        </p:spPr>
-      </p:cxnSp>
-      <p:cxnSp>
-        <p:nvCxnSpPr>
-          <p:cNvPr id="66" name="C3-E22 line 64" descr="sci-ppt:o064"/>
-          <p:cNvCxnSpPr/>
-          <p:nvPr/>
-        </p:nvCxnSpPr>
-        <p:spPr>
-          <a:xfrm>
-            <a:off x="9093708" y="1552266"/>
-            <a:ext cx="59436" cy="66203"/>
-          </a:xfrm>
-          <a:prstGeom prst="line">
-            <a:avLst/>
-          </a:prstGeom>
-          <a:ln w="25400">
-            <a:solidFill>
-              <a:srgbClr val="8EDBD4"/>
-            </a:solidFill>
-          </a:ln>
-          <a:effectLst/>
-        </p:spPr>
-      </p:cxnSp>
-      <p:cxnSp>
-        <p:nvCxnSpPr>
-          <p:cNvPr id="67" name="C3-E22 line 65" descr="sci-ppt:o065"/>
-          <p:cNvCxnSpPr/>
-          <p:nvPr/>
-        </p:nvCxnSpPr>
-        <p:spPr>
-          <a:xfrm>
-            <a:off x="9153144" y="1618469"/>
-            <a:ext cx="59436" cy="59724"/>
-          </a:xfrm>
-          <a:prstGeom prst="line">
-            <a:avLst/>
-          </a:prstGeom>
-          <a:ln w="25400">
-            <a:solidFill>
-              <a:srgbClr val="8EDBD4"/>
-            </a:solidFill>
-          </a:ln>
-          <a:effectLst/>
-        </p:spPr>
-      </p:cxnSp>
-      <p:cxnSp>
-        <p:nvCxnSpPr>
-          <p:cNvPr id="68" name="C3-E22 line 66" descr="sci-ppt:o066"/>
-          <p:cNvCxnSpPr/>
-          <p:nvPr/>
-        </p:nvCxnSpPr>
-        <p:spPr>
-          <a:xfrm>
-            <a:off x="9212580" y="1678193"/>
-            <a:ext cx="59436" cy="48676"/>
-          </a:xfrm>
-          <a:prstGeom prst="line">
-            <a:avLst/>
-          </a:prstGeom>
-          <a:ln w="25400">
-            <a:solidFill>
-              <a:srgbClr val="8EDBD4"/>
-            </a:solidFill>
-          </a:ln>
-          <a:effectLst/>
-        </p:spPr>
-      </p:cxnSp>
-      <p:cxnSp>
-        <p:nvCxnSpPr>
-          <p:cNvPr id="69" name="C3-E22 line 67" descr="sci-ppt:o067"/>
-          <p:cNvCxnSpPr/>
-          <p:nvPr/>
-        </p:nvCxnSpPr>
-        <p:spPr>
-          <a:xfrm>
-            <a:off x="9272016" y="1726869"/>
-            <a:ext cx="59436" cy="33774"/>
-          </a:xfrm>
-          <a:prstGeom prst="line">
-            <a:avLst/>
-          </a:prstGeom>
-          <a:ln w="25400">
-            <a:solidFill>
-              <a:srgbClr val="8EDBD4"/>
-            </a:solidFill>
-          </a:ln>
-          <a:effectLst/>
-        </p:spPr>
-      </p:cxnSp>
-      <p:cxnSp>
-        <p:nvCxnSpPr>
-          <p:cNvPr id="70" name="C3-E22 line 68" descr="sci-ppt:o068"/>
-          <p:cNvCxnSpPr/>
-          <p:nvPr/>
-        </p:nvCxnSpPr>
-        <p:spPr>
-          <a:xfrm>
-            <a:off x="9331452" y="1760643"/>
-            <a:ext cx="59436" cy="16032"/>
-          </a:xfrm>
-          <a:prstGeom prst="line">
-            <a:avLst/>
-          </a:prstGeom>
-          <a:ln w="25400">
-            <a:solidFill>
-              <a:srgbClr val="8EDBD4"/>
-            </a:solidFill>
-          </a:ln>
-          <a:effectLst/>
-        </p:spPr>
-      </p:cxnSp>
-      <p:cxnSp>
-        <p:nvCxnSpPr>
-          <p:cNvPr id="71" name="C3-E22 line 69" descr="sci-ppt:o069"/>
-          <p:cNvCxnSpPr/>
-          <p:nvPr/>
-        </p:nvCxnSpPr>
-        <p:spPr>
-          <a:xfrm flipV="1">
-            <a:off x="9390888" y="1773372"/>
-            <a:ext cx="59436" cy="3303"/>
-          </a:xfrm>
-          <a:prstGeom prst="line">
-            <a:avLst/>
-          </a:prstGeom>
-          <a:ln w="25400">
-            <a:solidFill>
-              <a:srgbClr val="8EDBD4"/>
-            </a:solidFill>
-          </a:ln>
-          <a:effectLst/>
-        </p:spPr>
-      </p:cxnSp>
-      <p:cxnSp>
-        <p:nvCxnSpPr>
-          <p:cNvPr id="72" name="C3-E22 line 70" descr="sci-ppt:o070"/>
-          <p:cNvCxnSpPr/>
-          <p:nvPr/>
-        </p:nvCxnSpPr>
-        <p:spPr>
-          <a:xfrm flipV="1">
-            <a:off x="9450324" y="1750538"/>
-            <a:ext cx="59436" cy="22834"/>
-          </a:xfrm>
-          <a:prstGeom prst="line">
-            <a:avLst/>
-          </a:prstGeom>
-          <a:ln w="25400">
-            <a:solidFill>
-              <a:srgbClr val="8EDBD4"/>
-            </a:solidFill>
-          </a:ln>
-          <a:effectLst/>
-        </p:spPr>
-      </p:cxnSp>
-      <p:cxnSp>
-        <p:nvCxnSpPr>
-          <p:cNvPr id="73" name="C3-E22 line 71" descr="sci-ppt:o071"/>
-          <p:cNvCxnSpPr/>
-          <p:nvPr/>
-        </p:nvCxnSpPr>
-        <p:spPr>
-          <a:xfrm flipV="1">
-            <a:off x="9509760" y="1709416"/>
-            <a:ext cx="59436" cy="41122"/>
-          </a:xfrm>
-          <a:prstGeom prst="line">
-            <a:avLst/>
-          </a:prstGeom>
-          <a:ln w="25400">
-            <a:solidFill>
-              <a:srgbClr val="8EDBD4"/>
-            </a:solidFill>
-          </a:ln>
-          <a:effectLst/>
-        </p:spPr>
-      </p:cxnSp>
-      <p:cxnSp>
-        <p:nvCxnSpPr>
-          <p:cNvPr id="74" name="C3-E22 line 72" descr="sci-ppt:o072"/>
-          <p:cNvCxnSpPr/>
-          <p:nvPr/>
-        </p:nvCxnSpPr>
-        <p:spPr>
-          <a:xfrm flipV="1">
-            <a:off x="9569196" y="1652633"/>
-            <a:ext cx="59436" cy="56783"/>
-          </a:xfrm>
-          <a:prstGeom prst="line">
-            <a:avLst/>
-          </a:prstGeom>
-          <a:ln w="25400">
-            <a:solidFill>
-              <a:srgbClr val="8EDBD4"/>
-            </a:solidFill>
-          </a:ln>
-          <a:effectLst/>
-        </p:spPr>
-      </p:cxnSp>
-      <p:cxnSp>
-        <p:nvCxnSpPr>
-          <p:cNvPr id="75" name="C3-E22 line 73" descr="sci-ppt:o073"/>
-          <p:cNvCxnSpPr/>
-          <p:nvPr/>
-        </p:nvCxnSpPr>
-        <p:spPr>
-          <a:xfrm flipV="1">
-            <a:off x="9628632" y="1584029"/>
-            <a:ext cx="59435" cy="68604"/>
-          </a:xfrm>
-          <a:prstGeom prst="line">
-            <a:avLst/>
-          </a:prstGeom>
-          <a:ln w="25400">
-            <a:solidFill>
-              <a:srgbClr val="8EDBD4"/>
-            </a:solidFill>
-          </a:ln>
-          <a:effectLst/>
-        </p:spPr>
-      </p:cxnSp>
-      <p:cxnSp>
-        <p:nvCxnSpPr>
-          <p:cNvPr id="76" name="C3-E22 line 74" descr="sci-ppt:o074"/>
-          <p:cNvCxnSpPr/>
-          <p:nvPr/>
-        </p:nvCxnSpPr>
-        <p:spPr>
-          <a:xfrm flipV="1">
-            <a:off x="9688067" y="1508404"/>
-            <a:ext cx="59437" cy="75625"/>
-          </a:xfrm>
-          <a:prstGeom prst="line">
-            <a:avLst/>
-          </a:prstGeom>
-          <a:ln w="25400">
-            <a:solidFill>
-              <a:srgbClr val="8EDBD4"/>
-            </a:solidFill>
-          </a:ln>
-          <a:effectLst/>
-        </p:spPr>
-      </p:cxnSp>
-      <p:cxnSp>
-        <p:nvCxnSpPr>
-          <p:cNvPr id="77" name="C3-E22 line 75" descr="sci-ppt:o075"/>
-          <p:cNvCxnSpPr/>
-          <p:nvPr/>
-        </p:nvCxnSpPr>
-        <p:spPr>
-          <a:xfrm flipV="1">
-            <a:off x="9747504" y="1431179"/>
-            <a:ext cx="59436" cy="77225"/>
-          </a:xfrm>
-          <a:prstGeom prst="line">
-            <a:avLst/>
-          </a:prstGeom>
-          <a:ln w="25400">
-            <a:solidFill>
-              <a:srgbClr val="8EDBD4"/>
-            </a:solidFill>
-          </a:ln>
-          <a:effectLst/>
-        </p:spPr>
-      </p:cxnSp>
-      <p:cxnSp>
-        <p:nvCxnSpPr>
-          <p:cNvPr id="78" name="C3-E22 line 76" descr="sci-ppt:o076"/>
-          <p:cNvCxnSpPr/>
-          <p:nvPr/>
-        </p:nvCxnSpPr>
-        <p:spPr>
-          <a:xfrm flipV="1">
-            <a:off x="9806940" y="1358008"/>
-            <a:ext cx="59436" cy="73171"/>
-          </a:xfrm>
-          <a:prstGeom prst="line">
-            <a:avLst/>
-          </a:prstGeom>
-          <a:ln w="25400">
-            <a:solidFill>
-              <a:srgbClr val="8EDBD4"/>
-            </a:solidFill>
-          </a:ln>
-          <a:effectLst/>
-        </p:spPr>
-      </p:cxnSp>
-      <p:cxnSp>
-        <p:nvCxnSpPr>
-          <p:cNvPr id="79" name="C3-E22 line 77" descr="sci-ppt:o077"/>
-          <p:cNvCxnSpPr/>
-          <p:nvPr/>
-        </p:nvCxnSpPr>
-        <p:spPr>
-          <a:xfrm flipV="1">
-            <a:off x="9866376" y="1294367"/>
-            <a:ext cx="59436" cy="63641"/>
-          </a:xfrm>
-          <a:prstGeom prst="line">
-            <a:avLst/>
-          </a:prstGeom>
-          <a:ln w="25400">
-            <a:solidFill>
-              <a:srgbClr val="8EDBD4"/>
-            </a:solidFill>
-          </a:ln>
-          <a:effectLst/>
-        </p:spPr>
-      </p:cxnSp>
-      <p:cxnSp>
-        <p:nvCxnSpPr>
-          <p:cNvPr id="80" name="C3-E22 line 78" descr="sci-ppt:o078"/>
-          <p:cNvCxnSpPr/>
-          <p:nvPr/>
-        </p:nvCxnSpPr>
-        <p:spPr>
-          <a:xfrm flipV="1">
-            <a:off x="9925812" y="1245141"/>
-            <a:ext cx="59436" cy="49226"/>
-          </a:xfrm>
-          <a:prstGeom prst="line">
-            <a:avLst/>
-          </a:prstGeom>
-          <a:ln w="25400">
-            <a:solidFill>
-              <a:srgbClr val="8EDBD4"/>
-            </a:solidFill>
-          </a:ln>
-          <a:effectLst/>
-        </p:spPr>
-      </p:cxnSp>
-      <p:cxnSp>
-        <p:nvCxnSpPr>
-          <p:cNvPr id="81" name="C3-E22 line 79" descr="sci-ppt:o079"/>
-          <p:cNvCxnSpPr/>
-          <p:nvPr/>
-        </p:nvCxnSpPr>
-        <p:spPr>
-          <a:xfrm flipV="1">
-            <a:off x="9985248" y="1214251"/>
-            <a:ext cx="59436" cy="30890"/>
-          </a:xfrm>
-          <a:prstGeom prst="line">
-            <a:avLst/>
-          </a:prstGeom>
-          <a:ln w="25400">
-            <a:solidFill>
-              <a:srgbClr val="8EDBD4"/>
-            </a:solidFill>
-          </a:ln>
-          <a:effectLst/>
-        </p:spPr>
-      </p:cxnSp>
-      <p:sp>
-        <p:nvSpPr>
-          <p:cNvPr id="82" name="C3-E22 text 80" descr="sci-ppt:o080"/>
+        <p:txBody>
+          <a:bodyPr rtlCol="0" anchor="ctr"/>
+          <a:lstStyle/>
+          <a:p>
+            <a:pPr algn="ctr"/>
+          </a:p>
+        </p:txBody>
+      </p:sp>
+      <p:sp>
+        <p:nvSpPr>
+          <p:cNvPr id="38" name="C3-E22 text 36" descr="sci-ppt:o036"/>
           <p:cNvSpPr txBox="1"/>
           <p:nvPr/>
         </p:nvSpPr>
         <p:spPr>
           <a:xfrm>
-            <a:off x="5852160" y="822960"/>
-            <a:ext cx="5303520" cy="365760"/>
+            <a:off x="7150608" y="1426464"/>
+            <a:ext cx="4581144" cy="254889"/>
           </a:xfrm>
           <a:prstGeom prst="rect">
             <a:avLst/>
@@ -4988,7 +4610,7 @@
           <a:effectLst/>
         </p:spPr>
         <p:txBody>
-          <a:bodyPr wrap="square" lIns="27432" rIns="27432" tIns="18288" bIns="18288" anchor="ctr">
+          <a:bodyPr wrap="none" lIns="18288" rIns="18288" tIns="18288" bIns="18288" anchor="t">
             <a:spAutoFit/>
           </a:bodyPr>
           <a:lstStyle/>
@@ -4999,27 +4621,67 @@
               </a:spcAft>
             </a:pPr>
             <a:r>
-              <a:rPr sz="1800" b="0" i="0">
+              <a:rPr sz="1350" b="1" i="0">
+                <a:solidFill>
+                  <a:srgbClr val="8EDBD4"/>
+                </a:solidFill>
+                <a:latin typeface="Arial"/>
+              </a:rPr>
+              <a:t>Declared flight case</a:t>
+            </a:r>
+          </a:p>
+        </p:txBody>
+      </p:sp>
+      <p:sp>
+        <p:nvSpPr>
+          <p:cNvPr id="39" name="C3-E22 text 37" descr="sci-ppt:o037"/>
+          <p:cNvSpPr txBox="1"/>
+          <p:nvPr/>
+        </p:nvSpPr>
+        <p:spPr>
+          <a:xfrm>
+            <a:off x="7178040" y="1828800"/>
+            <a:ext cx="2926080" cy="239395"/>
+          </a:xfrm>
+          <a:prstGeom prst="rect">
+            <a:avLst/>
+          </a:prstGeom>
+          <a:noFill/>
+          <a:effectLst/>
+        </p:spPr>
+        <p:txBody>
+          <a:bodyPr wrap="none" lIns="18288" rIns="18288" tIns="18288" bIns="18288" anchor="t">
+            <a:spAutoFit/>
+          </a:bodyPr>
+          <a:lstStyle/>
+          <a:p>
+            <a:pPr algn="l">
+              <a:spcAft>
+                <a:spcPts val="0"/>
+              </a:spcAft>
+            </a:pPr>
+            <a:r>
+              <a:rPr sz="1250" b="0" i="0">
                 <a:solidFill>
                   <a:srgbClr val="E7F0F3"/>
                 </a:solidFill>
                 <a:latin typeface="Arial"/>
               </a:rPr>
-              <a:t>δ₀ → δ_arr during H/U_j</a:t>
-            </a:r>
-          </a:p>
-        </p:txBody>
-      </p:sp>
-      <p:sp>
-        <p:nvSpPr>
-          <p:cNvPr id="83" name="C3-E22 text 81" descr="sci-ppt:o081"/>
+              <a:t>t_σ = √(ρa₀³/σⱼ)</a:t>
+            </a:r>
+          </a:p>
+        </p:txBody>
+      </p:sp>
+      <p:sp>
+        <p:nvSpPr>
+          <p:cNvPr id="40" name="C3-E22 text 38" descr="sci-ppt:o038"/>
           <p:cNvSpPr txBox="1"/>
           <p:nvPr/>
         </p:nvSpPr>
         <p:spPr>
           <a:xfrm>
-            <a:off x="1097280" y="3383280"/>
-            <a:ext cx="10058400" cy="365760"/>
+            <a:off x="10058400" y="1828800"/>
+            <a:ext cx="1645920" cy="247142"/>
           </a:xfrm>
           <a:prstGeom prst="rect">
             <a:avLst/>
@@ -5028,7 +4690,7 @@
           <a:effectLst/>
         </p:spPr>
         <p:txBody>
-          <a:bodyPr wrap="square" lIns="27432" rIns="27432" tIns="18288" bIns="18288" anchor="ctr">
+          <a:bodyPr wrap="none" lIns="18288" rIns="18288" tIns="18288" bIns="18288" anchor="t">
             <a:spAutoFit/>
           </a:bodyPr>
           <a:lstStyle/>
@@ -5039,49 +4701,27 @@
               </a:spcAft>
             </a:pPr>
             <a:r>
-              <a:rPr sz="1600" b="0" i="0">
+              <a:rPr sz="1300" b="1" i="0">
                 <a:solidFill>
-                  <a:srgbClr val="8EDBD4"/>
+                  <a:srgbClr val="F2B880"/>
                 </a:solidFill>
                 <a:latin typeface="Arial"/>
               </a:rPr>
-              <a:t>Linear growth applies while disturbances remain small relative to radius.</a:t>
-            </a:r>
-          </a:p>
-        </p:txBody>
-      </p:sp>
-      <p:cxnSp>
-        <p:nvCxnSpPr>
-          <p:cNvPr id="84" name="C3-E22 line 82" descr="sci-ppt:o082"/>
-          <p:cNvCxnSpPr/>
-          <p:nvPr/>
-        </p:nvCxnSpPr>
-        <p:spPr>
-          <a:xfrm>
-            <a:off x="274320" y="3977639"/>
-            <a:ext cx="11612880" cy="0"/>
-          </a:xfrm>
-          <a:prstGeom prst="line">
-            <a:avLst/>
-          </a:prstGeom>
-          <a:ln w="12700">
-            <a:solidFill>
-              <a:srgbClr val="405967"/>
-            </a:solidFill>
-          </a:ln>
-          <a:effectLst/>
-        </p:spPr>
-      </p:cxnSp>
-      <p:sp>
-        <p:nvSpPr>
-          <p:cNvPr id="85" name="C3-E22 text 83" descr="sci-ppt:o083"/>
+              <a:t>1.318 µs</a:t>
+            </a:r>
+          </a:p>
+        </p:txBody>
+      </p:sp>
+      <p:sp>
+        <p:nvSpPr>
+          <p:cNvPr id="41" name="C3-E22 text 39" descr="sci-ppt:o039"/>
           <p:cNvSpPr txBox="1"/>
           <p:nvPr/>
         </p:nvSpPr>
         <p:spPr>
           <a:xfrm>
-            <a:off x="320040" y="4096512"/>
-            <a:ext cx="5715000" cy="246888"/>
+            <a:off x="7178040" y="2286000"/>
+            <a:ext cx="2926080" cy="239395"/>
           </a:xfrm>
           <a:prstGeom prst="rect">
             <a:avLst/>
@@ -5090,7 +4730,7 @@
           <a:effectLst/>
         </p:spPr>
         <p:txBody>
-          <a:bodyPr wrap="square" lIns="27432" rIns="27432" tIns="18288" bIns="18288" anchor="ctr">
+          <a:bodyPr wrap="none" lIns="18288" rIns="18288" tIns="18288" bIns="18288" anchor="t">
             <a:spAutoFit/>
           </a:bodyPr>
           <a:lstStyle/>
@@ -5101,27 +4741,379 @@
               </a:spcAft>
             </a:pPr>
             <a:r>
-              <a:rPr sz="1150" b="0" i="0">
+              <a:rPr sz="1250" b="0" i="0">
+                <a:solidFill>
+                  <a:srgbClr val="E7F0F3"/>
+                </a:solidFill>
+                <a:latin typeface="Arial"/>
+              </a:rPr>
+              <a:t>gₘₐₓ = 0.343339 / t_σ</a:t>
+            </a:r>
+          </a:p>
+        </p:txBody>
+      </p:sp>
+      <p:sp>
+        <p:nvSpPr>
+          <p:cNvPr id="42" name="C3-E22 text 40" descr="sci-ppt:o040"/>
+          <p:cNvSpPr txBox="1"/>
+          <p:nvPr/>
+        </p:nvSpPr>
+        <p:spPr>
+          <a:xfrm>
+            <a:off x="10058400" y="2286000"/>
+            <a:ext cx="1645920" cy="247142"/>
+          </a:xfrm>
+          <a:prstGeom prst="rect">
+            <a:avLst/>
+          </a:prstGeom>
+          <a:noFill/>
+          <a:effectLst/>
+        </p:spPr>
+        <p:txBody>
+          <a:bodyPr wrap="none" lIns="18288" rIns="18288" tIns="18288" bIns="18288" anchor="t">
+            <a:spAutoFit/>
+          </a:bodyPr>
+          <a:lstStyle/>
+          <a:p>
+            <a:pPr algn="l">
+              <a:spcAft>
+                <a:spcPts val="0"/>
+              </a:spcAft>
+            </a:pPr>
+            <a:r>
+              <a:rPr sz="1300" b="1" i="0">
+                <a:solidFill>
+                  <a:srgbClr val="F2B880"/>
+                </a:solidFill>
+                <a:latin typeface="Arial"/>
+              </a:rPr>
+              <a:t>0.2606 µs⁻¹</a:t>
+            </a:r>
+          </a:p>
+        </p:txBody>
+      </p:sp>
+      <p:sp>
+        <p:nvSpPr>
+          <p:cNvPr id="43" name="C3-E22 text 41" descr="sci-ppt:o041"/>
+          <p:cNvSpPr txBox="1"/>
+          <p:nvPr/>
+        </p:nvSpPr>
+        <p:spPr>
+          <a:xfrm>
+            <a:off x="7178040" y="2743200"/>
+            <a:ext cx="2926080" cy="239395"/>
+          </a:xfrm>
+          <a:prstGeom prst="rect">
+            <a:avLst/>
+          </a:prstGeom>
+          <a:noFill/>
+          <a:effectLst/>
+        </p:spPr>
+        <p:txBody>
+          <a:bodyPr wrap="none" lIns="18288" rIns="18288" tIns="18288" bIns="18288" anchor="t">
+            <a:spAutoFit/>
+          </a:bodyPr>
+          <a:lstStyle/>
+          <a:p>
+            <a:pPr algn="l">
+              <a:spcAft>
+                <a:spcPts val="0"/>
+              </a:spcAft>
+            </a:pPr>
+            <a:r>
+              <a:rPr sz="1250" b="0" i="0">
+                <a:solidFill>
+                  <a:srgbClr val="E7F0F3"/>
+                </a:solidFill>
+                <a:latin typeface="Arial"/>
+              </a:rPr>
+              <a:t>Re = ρU_jdⱼ/μ</a:t>
+            </a:r>
+          </a:p>
+        </p:txBody>
+      </p:sp>
+      <p:sp>
+        <p:nvSpPr>
+          <p:cNvPr id="44" name="C3-E22 text 42" descr="sci-ppt:o042"/>
+          <p:cNvSpPr txBox="1"/>
+          <p:nvPr/>
+        </p:nvSpPr>
+        <p:spPr>
+          <a:xfrm>
+            <a:off x="10058400" y="2743200"/>
+            <a:ext cx="1645920" cy="247142"/>
+          </a:xfrm>
+          <a:prstGeom prst="rect">
+            <a:avLst/>
+          </a:prstGeom>
+          <a:noFill/>
+          <a:effectLst/>
+        </p:spPr>
+        <p:txBody>
+          <a:bodyPr wrap="none" lIns="18288" rIns="18288" tIns="18288" bIns="18288" anchor="t">
+            <a:spAutoFit/>
+          </a:bodyPr>
+          <a:lstStyle/>
+          <a:p>
+            <a:pPr algn="l">
+              <a:spcAft>
+                <a:spcPts val="0"/>
+              </a:spcAft>
+            </a:pPr>
+            <a:r>
+              <a:rPr sz="1300" b="1" i="0">
+                <a:solidFill>
+                  <a:srgbClr val="F2B880"/>
+                </a:solidFill>
+                <a:latin typeface="Arial"/>
+              </a:rPr>
+              <a:t>319</a:t>
+            </a:r>
+          </a:p>
+        </p:txBody>
+      </p:sp>
+      <p:sp>
+        <p:nvSpPr>
+          <p:cNvPr id="45" name="C3-E22 text 43" descr="sci-ppt:o043"/>
+          <p:cNvSpPr txBox="1"/>
+          <p:nvPr/>
+        </p:nvSpPr>
+        <p:spPr>
+          <a:xfrm>
+            <a:off x="7178040" y="3200400"/>
+            <a:ext cx="2926080" cy="239395"/>
+          </a:xfrm>
+          <a:prstGeom prst="rect">
+            <a:avLst/>
+          </a:prstGeom>
+          <a:noFill/>
+          <a:effectLst/>
+        </p:spPr>
+        <p:txBody>
+          <a:bodyPr wrap="none" lIns="18288" rIns="18288" tIns="18288" bIns="18288" anchor="t">
+            <a:spAutoFit/>
+          </a:bodyPr>
+          <a:lstStyle/>
+          <a:p>
+            <a:pPr algn="l">
+              <a:spcAft>
+                <a:spcPts val="0"/>
+              </a:spcAft>
+            </a:pPr>
+            <a:r>
+              <a:rPr sz="1250" b="0" i="0">
+                <a:solidFill>
+                  <a:srgbClr val="E7F0F3"/>
+                </a:solidFill>
+                <a:latin typeface="Arial"/>
+              </a:rPr>
+              <a:t>We = ρUⱼ²dⱼ/σⱼ</a:t>
+            </a:r>
+          </a:p>
+        </p:txBody>
+      </p:sp>
+      <p:sp>
+        <p:nvSpPr>
+          <p:cNvPr id="46" name="C3-E22 text 44" descr="sci-ppt:o044"/>
+          <p:cNvSpPr txBox="1"/>
+          <p:nvPr/>
+        </p:nvSpPr>
+        <p:spPr>
+          <a:xfrm>
+            <a:off x="10058400" y="3200400"/>
+            <a:ext cx="1645920" cy="247142"/>
+          </a:xfrm>
+          <a:prstGeom prst="rect">
+            <a:avLst/>
+          </a:prstGeom>
+          <a:noFill/>
+          <a:effectLst/>
+        </p:spPr>
+        <p:txBody>
+          <a:bodyPr wrap="none" lIns="18288" rIns="18288" tIns="18288" bIns="18288" anchor="t">
+            <a:spAutoFit/>
+          </a:bodyPr>
+          <a:lstStyle/>
+          <a:p>
+            <a:pPr algn="l">
+              <a:spcAft>
+                <a:spcPts val="0"/>
+              </a:spcAft>
+            </a:pPr>
+            <a:r>
+              <a:rPr sz="1300" b="1" i="0">
+                <a:solidFill>
+                  <a:srgbClr val="F2B880"/>
+                </a:solidFill>
+                <a:latin typeface="Arial"/>
+              </a:rPr>
+              <a:t>141</a:t>
+            </a:r>
+          </a:p>
+        </p:txBody>
+      </p:sp>
+      <p:sp>
+        <p:nvSpPr>
+          <p:cNvPr id="47" name="C3-E22 text 45" descr="sci-ppt:o045"/>
+          <p:cNvSpPr txBox="1"/>
+          <p:nvPr/>
+        </p:nvSpPr>
+        <p:spPr>
+          <a:xfrm>
+            <a:off x="7178040" y="3657600"/>
+            <a:ext cx="2926080" cy="239395"/>
+          </a:xfrm>
+          <a:prstGeom prst="rect">
+            <a:avLst/>
+          </a:prstGeom>
+          <a:noFill/>
+          <a:effectLst/>
+        </p:spPr>
+        <p:txBody>
+          <a:bodyPr wrap="none" lIns="18288" rIns="18288" tIns="18288" bIns="18288" anchor="t">
+            <a:spAutoFit/>
+          </a:bodyPr>
+          <a:lstStyle/>
+          <a:p>
+            <a:pPr algn="l">
+              <a:spcAft>
+                <a:spcPts val="0"/>
+              </a:spcAft>
+            </a:pPr>
+            <a:r>
+              <a:rPr sz="1250" b="0" i="0">
+                <a:solidFill>
+                  <a:srgbClr val="E7F0F3"/>
+                </a:solidFill>
+                <a:latin typeface="Arial"/>
+              </a:rPr>
+              <a:t>Oh = μ/√(ρσ_jdⱼ)</a:t>
+            </a:r>
+          </a:p>
+        </p:txBody>
+      </p:sp>
+      <p:sp>
+        <p:nvSpPr>
+          <p:cNvPr id="48" name="C3-E22 text 46" descr="sci-ppt:o046"/>
+          <p:cNvSpPr txBox="1"/>
+          <p:nvPr/>
+        </p:nvSpPr>
+        <p:spPr>
+          <a:xfrm>
+            <a:off x="10058400" y="3657600"/>
+            <a:ext cx="1645920" cy="247142"/>
+          </a:xfrm>
+          <a:prstGeom prst="rect">
+            <a:avLst/>
+          </a:prstGeom>
+          <a:noFill/>
+          <a:effectLst/>
+        </p:spPr>
+        <p:txBody>
+          <a:bodyPr wrap="none" lIns="18288" rIns="18288" tIns="18288" bIns="18288" anchor="t">
+            <a:spAutoFit/>
+          </a:bodyPr>
+          <a:lstStyle/>
+          <a:p>
+            <a:pPr algn="l">
+              <a:spcAft>
+                <a:spcPts val="0"/>
+              </a:spcAft>
+            </a:pPr>
+            <a:r>
+              <a:rPr sz="1300" b="1" i="0">
+                <a:solidFill>
+                  <a:srgbClr val="F2B880"/>
+                </a:solidFill>
+                <a:latin typeface="Arial"/>
+              </a:rPr>
+              <a:t>0.0373</a:t>
+            </a:r>
+          </a:p>
+        </p:txBody>
+      </p:sp>
+      <p:sp>
+        <p:nvSpPr>
+          <p:cNvPr id="49" name="C3-E22 text 47" descr="sci-ppt:o047"/>
+          <p:cNvSpPr txBox="1"/>
+          <p:nvPr/>
+        </p:nvSpPr>
+        <p:spPr>
+          <a:xfrm>
+            <a:off x="7178040" y="4297680"/>
+            <a:ext cx="4572000" cy="603504"/>
+          </a:xfrm>
+          <a:prstGeom prst="rect">
+            <a:avLst/>
+          </a:prstGeom>
+          <a:noFill/>
+          <a:effectLst/>
+        </p:spPr>
+        <p:txBody>
+          <a:bodyPr wrap="none" lIns="18288" rIns="18288" tIns="18288" bIns="18288" anchor="t">
+            <a:spAutoFit/>
+          </a:bodyPr>
+          <a:lstStyle/>
+          <a:p>
+            <a:pPr algn="l">
+              <a:spcAft>
+                <a:spcPts val="0"/>
+              </a:spcAft>
+            </a:pPr>
+            <a:r>
+              <a:rPr sz="1200" b="0" i="0">
                 <a:solidFill>
                   <a:srgbClr val="B4C7D2"/>
                 </a:solidFill>
                 <a:latin typeface="Arial"/>
               </a:rPr>
-              <a:t>• H flight gap; U_j travel speed</a:t>
-            </a:r>
-          </a:p>
-        </p:txBody>
-      </p:sp>
-      <p:sp>
-        <p:nvSpPr>
-          <p:cNvPr id="86" name="C3-E22 text 84" descr="sci-ppt:o084"/>
+              <a:t>Growth during the actual flight stays small, but</a:t>
+            </a:r>
+          </a:p>
+          <a:p>
+            <a:pPr algn="l">
+              <a:spcAft>
+                <a:spcPts val="0"/>
+              </a:spcAft>
+            </a:pPr>
+            <a:r>
+              <a:rPr sz="1200" b="0" i="0">
+                <a:solidFill>
+                  <a:srgbClr val="B4C7D2"/>
+                </a:solidFill>
+                <a:latin typeface="Arial"/>
+              </a:rPr>
+              <a:t>extrapolating to the 17.7 µs threshold leaves exact</a:t>
+            </a:r>
+          </a:p>
+          <a:p>
+            <a:pPr algn="l">
+              <a:spcAft>
+                <a:spcPts val="0"/>
+              </a:spcAft>
+            </a:pPr>
+            <a:r>
+              <a:rPr sz="1200" b="0" i="0">
+                <a:solidFill>
+                  <a:srgbClr val="B4C7D2"/>
+                </a:solidFill>
+                <a:latin typeface="Arial"/>
+              </a:rPr>
+              <a:t>breakup unresolved.</a:t>
+            </a:r>
+          </a:p>
+        </p:txBody>
+      </p:sp>
+      <p:sp>
+        <p:nvSpPr>
+          <p:cNvPr id="50" name="C3-E22 text 48" descr="sci-ppt:o048"/>
           <p:cNvSpPr txBox="1"/>
           <p:nvPr/>
         </p:nvSpPr>
         <p:spPr>
           <a:xfrm>
-            <a:off x="6217920" y="4096512"/>
-            <a:ext cx="5715000" cy="246888"/>
+            <a:off x="914400" y="5733288"/>
+            <a:ext cx="10972800" cy="231648"/>
           </a:xfrm>
           <a:prstGeom prst="rect">
             <a:avLst/>
@@ -5130,7 +5122,7 @@
           <a:effectLst/>
         </p:spPr>
         <p:txBody>
-          <a:bodyPr wrap="square" lIns="27432" rIns="27432" tIns="18288" bIns="18288" anchor="ctr">
+          <a:bodyPr wrap="none" lIns="18288" rIns="18288" tIns="18288" bIns="18288" anchor="t">
             <a:spAutoFit/>
           </a:bodyPr>
           <a:lstStyle/>
@@ -5141,27 +5133,27 @@
               </a:spcAft>
             </a:pPr>
             <a:r>
-              <a:rPr sz="1150" b="0" i="0">
+              <a:rPr sz="1200" b="0" i="0">
                 <a:solidFill>
-                  <a:srgbClr val="B4C7D2"/>
+                  <a:srgbClr val="E7F0F3"/>
                 </a:solidFill>
                 <a:latin typeface="Arial"/>
               </a:rPr>
-              <a:t>• a₀, d_j = 2a₀</a:t>
-            </a:r>
-          </a:p>
-        </p:txBody>
-      </p:sp>
-      <p:sp>
-        <p:nvSpPr>
-          <p:cNvPr id="87" name="C3-E22 text 85" descr="sci-ppt:o085"/>
+              <a:t>δₐᵣᵣ/a₀ = (δ₀/a₀) exp(gₘₐₓ H/Uⱼ) with H = 100 µm, Uⱼ = 31.9 m/s, a₀ = 5 µm, ρ = 1000 kg/m³, σⱼ = 0.072 N/m, μ = 1 mPa s.</a:t>
+            </a:r>
+          </a:p>
+        </p:txBody>
+      </p:sp>
+      <p:sp>
+        <p:nvSpPr>
+          <p:cNvPr id="51" name="C3-E22 text 49" descr="sci-ppt:o049"/>
           <p:cNvSpPr txBox="1"/>
           <p:nvPr/>
         </p:nvSpPr>
         <p:spPr>
           <a:xfrm>
-            <a:off x="320040" y="4329684"/>
-            <a:ext cx="5715000" cy="246888"/>
+            <a:off x="320040" y="6510528"/>
+            <a:ext cx="11521440" cy="200660"/>
           </a:xfrm>
           <a:prstGeom prst="rect">
             <a:avLst/>
@@ -5170,287 +5162,7 @@
           <a:effectLst/>
         </p:spPr>
         <p:txBody>
-          <a:bodyPr wrap="square" lIns="27432" rIns="27432" tIns="18288" bIns="18288" anchor="ctr">
-            <a:spAutoFit/>
-          </a:bodyPr>
-          <a:lstStyle/>
-          <a:p>
-            <a:pPr algn="l">
-              <a:spcAft>
-                <a:spcPts val="0"/>
-              </a:spcAft>
-            </a:pPr>
-            <a:r>
-              <a:rPr sz="1150" b="0" i="0">
-                <a:solidFill>
-                  <a:srgbClr val="B4C7D2"/>
-                </a:solidFill>
-                <a:latin typeface="Arial"/>
-              </a:rPr>
-              <a:t>• δ₀ → δ_arr → δ_crit</a:t>
-            </a:r>
-          </a:p>
-        </p:txBody>
-      </p:sp>
-      <p:sp>
-        <p:nvSpPr>
-          <p:cNvPr id="88" name="C3-E22 text 86" descr="sci-ppt:o086"/>
-          <p:cNvSpPr txBox="1"/>
-          <p:nvPr/>
-        </p:nvSpPr>
-        <p:spPr>
-          <a:xfrm>
-            <a:off x="6217920" y="4329684"/>
-            <a:ext cx="5715000" cy="246888"/>
-          </a:xfrm>
-          <a:prstGeom prst="rect">
-            <a:avLst/>
-          </a:prstGeom>
-          <a:noFill/>
-          <a:effectLst/>
-        </p:spPr>
-        <p:txBody>
-          <a:bodyPr wrap="square" lIns="27432" rIns="27432" tIns="18288" bIns="18288" anchor="ctr">
-            <a:spAutoFit/>
-          </a:bodyPr>
-          <a:lstStyle/>
-          <a:p>
-            <a:pPr algn="l">
-              <a:spcAft>
-                <a:spcPts val="0"/>
-              </a:spcAft>
-            </a:pPr>
-            <a:r>
-              <a:rPr sz="1150" b="0" i="0">
-                <a:solidFill>
-                  <a:srgbClr val="B4C7D2"/>
-                </a:solidFill>
-                <a:latin typeface="Arial"/>
-              </a:rPr>
-              <a:t>• t_flight, t_lin, t_σ</a:t>
-            </a:r>
-          </a:p>
-        </p:txBody>
-      </p:sp>
-      <p:sp>
-        <p:nvSpPr>
-          <p:cNvPr id="89" name="C3-E22 text 87" descr="sci-ppt:o087"/>
-          <p:cNvSpPr txBox="1"/>
-          <p:nvPr/>
-        </p:nvSpPr>
-        <p:spPr>
-          <a:xfrm>
-            <a:off x="320040" y="4562856"/>
-            <a:ext cx="5715000" cy="246888"/>
-          </a:xfrm>
-          <a:prstGeom prst="rect">
-            <a:avLst/>
-          </a:prstGeom>
-          <a:noFill/>
-          <a:effectLst/>
-        </p:spPr>
-        <p:txBody>
-          <a:bodyPr wrap="square" lIns="27432" rIns="27432" tIns="18288" bIns="18288" anchor="ctr">
-            <a:spAutoFit/>
-          </a:bodyPr>
-          <a:lstStyle/>
-          <a:p>
-            <a:pPr algn="l">
-              <a:spcAft>
-                <a:spcPts val="0"/>
-              </a:spcAft>
-            </a:pPr>
-            <a:r>
-              <a:rPr sz="1150" b="0" i="0">
-                <a:solidFill>
-                  <a:srgbClr val="B4C7D2"/>
-                </a:solidFill>
-                <a:latin typeface="Arial"/>
-              </a:rPr>
-              <a:t>• g_max growth; λ_max wavelength</a:t>
-            </a:r>
-          </a:p>
-        </p:txBody>
-      </p:sp>
-      <p:sp>
-        <p:nvSpPr>
-          <p:cNvPr id="90" name="C3-E22 text 88" descr="sci-ppt:o088"/>
-          <p:cNvSpPr txBox="1"/>
-          <p:nvPr/>
-        </p:nvSpPr>
-        <p:spPr>
-          <a:xfrm>
-            <a:off x="6217920" y="4562856"/>
-            <a:ext cx="5715000" cy="246888"/>
-          </a:xfrm>
-          <a:prstGeom prst="rect">
-            <a:avLst/>
-          </a:prstGeom>
-          <a:noFill/>
-          <a:effectLst/>
-        </p:spPr>
-        <p:txBody>
-          <a:bodyPr wrap="square" lIns="27432" rIns="27432" tIns="18288" bIns="18288" anchor="ctr">
-            <a:spAutoFit/>
-          </a:bodyPr>
-          <a:lstStyle/>
-          <a:p>
-            <a:pPr algn="l">
-              <a:spcAft>
-                <a:spcPts val="0"/>
-              </a:spcAft>
-            </a:pPr>
-            <a:r>
-              <a:rPr sz="1150" b="0" i="0">
-                <a:solidFill>
-                  <a:srgbClr val="B4C7D2"/>
-                </a:solidFill>
-                <a:latin typeface="Arial"/>
-              </a:rPr>
-              <a:t>• ρ, σ_j, μ; Re_j, We_j, Oh_j</a:t>
-            </a:r>
-          </a:p>
-        </p:txBody>
-      </p:sp>
-      <p:sp>
-        <p:nvSpPr>
-          <p:cNvPr id="91" name="C3-E22 text 89" descr="sci-ppt:o089"/>
-          <p:cNvSpPr txBox="1"/>
-          <p:nvPr/>
-        </p:nvSpPr>
-        <p:spPr>
-          <a:xfrm>
-            <a:off x="320040" y="4796028"/>
-            <a:ext cx="5715000" cy="246888"/>
-          </a:xfrm>
-          <a:prstGeom prst="rect">
-            <a:avLst/>
-          </a:prstGeom>
-          <a:noFill/>
-          <a:effectLst/>
-        </p:spPr>
-        <p:txBody>
-          <a:bodyPr wrap="square" lIns="27432" rIns="27432" tIns="18288" bIns="18288" anchor="ctr">
-            <a:spAutoFit/>
-          </a:bodyPr>
-          <a:lstStyle/>
-          <a:p>
-            <a:pPr algn="l">
-              <a:spcAft>
-                <a:spcPts val="0"/>
-              </a:spcAft>
-            </a:pPr>
-            <a:r>
-              <a:rPr sz="1150" b="0" i="0">
-                <a:solidFill>
-                  <a:srgbClr val="B4C7D2"/>
-                </a:solidFill>
-                <a:latin typeface="Arial"/>
-              </a:rPr>
-              <a:t>• ln, exp: growth legend</a:t>
-            </a:r>
-          </a:p>
-        </p:txBody>
-      </p:sp>
-      <p:sp>
-        <p:nvSpPr>
-          <p:cNvPr id="92" name="C3-E22 text 90" descr="sci-ppt:o090"/>
-          <p:cNvSpPr txBox="1"/>
-          <p:nvPr/>
-        </p:nvSpPr>
-        <p:spPr>
-          <a:xfrm>
-            <a:off x="320040" y="5596128"/>
-            <a:ext cx="11430000" cy="292608"/>
-          </a:xfrm>
-          <a:prstGeom prst="rect">
-            <a:avLst/>
-          </a:prstGeom>
-          <a:noFill/>
-          <a:effectLst/>
-        </p:spPr>
-        <p:txBody>
-          <a:bodyPr wrap="square" lIns="27432" rIns="27432" tIns="18288" bIns="18288" anchor="ctr">
-            <a:spAutoFit/>
-          </a:bodyPr>
-          <a:lstStyle/>
-          <a:p>
-            <a:pPr algn="l">
-              <a:spcAft>
-                <a:spcPts val="0"/>
-              </a:spcAft>
-            </a:pPr>
-            <a:r>
-              <a:rPr sz="1150" b="0" i="0">
-                <a:solidFill>
-                  <a:srgbClr val="8EDBD4"/>
-                </a:solidFill>
-                <a:latin typeface="Arial"/>
-              </a:rPr>
-              <a:t>Radius defines capillary time; diameter defines the three groups</a:t>
-            </a:r>
-          </a:p>
-        </p:txBody>
-      </p:sp>
-      <p:sp>
-        <p:nvSpPr>
-          <p:cNvPr id="93" name="C3-E22 text 91" descr="sci-ppt:o091"/>
-          <p:cNvSpPr txBox="1"/>
-          <p:nvPr/>
-        </p:nvSpPr>
-        <p:spPr>
-          <a:xfrm>
-            <a:off x="320040" y="5870448"/>
-            <a:ext cx="11430000" cy="292608"/>
-          </a:xfrm>
-          <a:prstGeom prst="rect">
-            <a:avLst/>
-          </a:prstGeom>
-          <a:noFill/>
-          <a:effectLst/>
-        </p:spPr>
-        <p:txBody>
-          <a:bodyPr wrap="square" lIns="27432" rIns="27432" tIns="18288" bIns="18288" anchor="ctr">
-            <a:spAutoFit/>
-          </a:bodyPr>
-          <a:lstStyle/>
-          <a:p>
-            <a:pPr algn="l">
-              <a:spcAft>
-                <a:spcPts val="0"/>
-              </a:spcAft>
-            </a:pPr>
-            <a:r>
-              <a:rPr sz="1150" b="0" i="0">
-                <a:solidFill>
-                  <a:srgbClr val="8EDBD4"/>
-                </a:solidFill>
-                <a:latin typeface="Arial"/>
-              </a:rPr>
-              <a:t>A radius-sized disturbance is outside linear validity</a:t>
-            </a:r>
-          </a:p>
-        </p:txBody>
-      </p:sp>
-      <p:sp>
-        <p:nvSpPr>
-          <p:cNvPr id="94" name="C3-E22 text 92" descr="sci-ppt:o092"/>
-          <p:cNvSpPr txBox="1"/>
-          <p:nvPr/>
-        </p:nvSpPr>
-        <p:spPr>
-          <a:xfrm>
-            <a:off x="320040" y="6473952"/>
-            <a:ext cx="11430000" cy="256032"/>
-          </a:xfrm>
-          <a:prstGeom prst="rect">
-            <a:avLst/>
-          </a:prstGeom>
-          <a:noFill/>
-          <a:effectLst/>
-        </p:spPr>
-        <p:txBody>
-          <a:bodyPr wrap="square" lIns="27432" rIns="27432" tIns="18288" bIns="18288" anchor="ctr">
+          <a:bodyPr wrap="none" lIns="18288" rIns="18288" tIns="18288" bIns="18288" anchor="t">
             <a:spAutoFit/>
           </a:bodyPr>
           <a:lstStyle/>
@@ -5467,7 +5179,7 @@
                 </a:solidFill>
                 <a:latin typeface="Arial"/>
               </a:rPr>
-              <a:t>Model schematic; geometry is not to scale.</a:t>
+              <a:t>Finite-flight growth and regime numbers of Eq. C3-E22 (log vertical axis).</a:t>
             </a:r>
           </a:p>
         </p:txBody>
